--- a/tests/outputs/campaign-brief-tuyen-sinh.pptx
+++ b/tests/outputs/campaign-brief-tuyen-sinh.pptx
@@ -12,9 +12,10 @@
     <p:sldId id="260" r:id="rId6"/>
     <p:sldId id="261" r:id="rId7"/>
     <p:sldId id="262" r:id="rId8"/>
+    <p:sldId id="263" r:id="rId9"/>
   </p:sldIdLst>
   <p:notesMasterIdLst>
-    <p:notesMasterId r:id="rId9"/>
+    <p:notesMasterId r:id="rId10"/>
   </p:notesMasterIdLst>
   <p:sldSz cx="9144000" cy="5143500"/>
   <p:notesSz cx="5143500" cy="9144000"/>
@@ -113,7 +114,7 @@
   <p:extLst>
     <p:ext uri="{521415D9-36F7-43E2-AB2F-B90AF26B5E84}">
       <p14:sectionLst xmlns:p14="http://schemas.microsoft.com/office/powerpoint/2010/main">
-        <p14:section name="Brief" id="{776d4d88-f88d-c438-8188-7d1875ae39a8}">
+        <p14:section name="Brief" id="{61d3c8f3-bd7d-df9c-815b-1f0ea80d9175}">
           <p14:sldIdLst>
             <p14:sldId id="256"/>
             <p14:sldId id="257"/>
@@ -121,11 +122,12 @@
             <p14:sldId id="259"/>
           </p14:sldIdLst>
         </p14:section>
-        <p14:section name="Kế hoạch" id="{ddb0a298-4956-3d92-4363-db27050ba76b}">
+        <p14:section name="Kế hoạch" id="{c372489d-cece-5628-5c98-806b551ee931}">
           <p14:sldIdLst>
             <p14:sldId id="260"/>
             <p14:sldId id="261"/>
             <p14:sldId id="262"/>
+            <p14:sldId id="263"/>
           </p14:sldIdLst>
         </p14:section>
       </p14:sectionLst>
@@ -165,7 +167,7 @@
           </c:tx>
           <c:spPr>
             <a:solidFill>
-              <a:srgbClr val="0F6E6E"/>
+              <a:srgbClr val="1F4E8C"/>
             </a:solidFill>
             <a:effectLst/>
           </c:spPr>
@@ -179,7 +181,7 @@
                 <a:pPr>
                   <a:defRPr b="0" i="0" strike="noStrike" sz="1200" u="none">
                     <a:solidFill>
-                      <a:srgbClr val="1B1F2A"/>
+                      <a:srgbClr val="1A2433"/>
                     </a:solidFill>
                     <a:latin typeface="Arial"/>
                   </a:defRPr>
@@ -247,7 +249,7 @@
               <a:pPr>
                 <a:defRPr b="0" i="0" strike="noStrike" sz="1200" u="none">
                   <a:solidFill>
-                    <a:srgbClr val="1B1F2A"/>
+                    <a:srgbClr val="1A2433"/>
                   </a:solidFill>
                   <a:latin typeface="Arial"/>
                 </a:defRPr>
@@ -295,7 +297,7 @@
             <a:pPr>
               <a:defRPr sz="1200" b="0" i="0" u="none" strike="noStrike">
                 <a:solidFill>
-                  <a:srgbClr val="1B1F2A"/>
+                  <a:srgbClr val="1A2433"/>
                 </a:solidFill>
                 <a:latin typeface="Arial"/>
               </a:defRPr>
@@ -321,7 +323,7 @@
           <c:spPr>
             <a:ln w="6350" cap="flat">
               <a:solidFill>
-                <a:srgbClr val="D9E0DF"/>
+                <a:srgbClr val="E3E8EF"/>
               </a:solidFill>
               <a:prstDash val="solid"/>
               <a:round/>
@@ -375,7 +377,7 @@
             <a:pPr>
               <a:defRPr sz="1200" b="0" i="0" u="none" strike="noStrike">
                 <a:solidFill>
-                  <a:srgbClr val="1B1F2A"/>
+                  <a:srgbClr val="1A2433"/>
                 </a:solidFill>
                 <a:latin typeface="Arial"/>
               </a:defRPr>
@@ -1376,6 +1378,94 @@
 </p:notes>
 </file>
 
+<file path=ppt/notesSlides/notesSlide8.xml><?xml version="1.0" encoding="utf-8"?>
+<p:notes xmlns:a="http://schemas.openxmlformats.org/drawingml/2006/main" xmlns:r="http://schemas.openxmlformats.org/officeDocument/2006/relationships" xmlns:p="http://schemas.openxmlformats.org/presentationml/2006/main">
+  <p:cSld>
+    <p:spTree>
+      <p:nvGrpSpPr>
+        <p:cNvPr id="1" name=""/>
+        <p:cNvGrpSpPr/>
+        <p:nvPr/>
+      </p:nvGrpSpPr>
+      <p:grpSpPr>
+        <a:xfrm>
+          <a:off x="0" y="0"/>
+          <a:ext cx="0" cy="0"/>
+          <a:chOff x="0" y="0"/>
+          <a:chExt cx="0" cy="0"/>
+        </a:xfrm>
+      </p:grpSpPr>
+      <p:sp>
+        <p:nvSpPr>
+          <p:cNvPr id="2" name="Slide Image Placeholder 1"/>
+          <p:cNvSpPr>
+            <a:spLocks noGrp="1" noRot="1" noChangeAspect="1"/>
+          </p:cNvSpPr>
+          <p:nvPr>
+            <p:ph type="sldImg"/>
+          </p:nvPr>
+        </p:nvSpPr>
+        <p:spPr/>
+      </p:sp>
+      <p:sp>
+        <p:nvSpPr>
+          <p:cNvPr id="3" name="Notes Placeholder 2"/>
+          <p:cNvSpPr>
+            <a:spLocks noGrp="1"/>
+          </p:cNvSpPr>
+          <p:nvPr>
+            <p:ph type="body" idx="1"/>
+          </p:nvPr>
+        </p:nvSpPr>
+        <p:spPr/>
+        <p:txBody>
+          <a:bodyPr/>
+          <a:lstStyle/>
+          <a:p>
+            <a:r>
+              <a:rPr lang="en-US" dirty="0"/>
+              <a:t>Danh sách thông tin còn thiếu để brief đủ điều kiện duyệt. Đây là các chỗ đang để trống, không tự điền.</a:t>
+            </a:r>
+            <a:endParaRPr lang="en-US" dirty="0"/>
+          </a:p>
+        </p:txBody>
+      </p:sp>
+      <p:sp>
+        <p:nvSpPr>
+          <p:cNvPr id="4" name="Slide Number Placeholder 3"/>
+          <p:cNvSpPr>
+            <a:spLocks noGrp="1"/>
+          </p:cNvSpPr>
+          <p:nvPr>
+            <p:ph type="sldNum" sz="quarter" idx="10"/>
+          </p:nvPr>
+        </p:nvSpPr>
+        <p:spPr/>
+        <p:txBody>
+          <a:bodyPr/>
+          <a:lstStyle/>
+          <a:p>
+            <a:fld id="{F7021451-1387-4CA6-816F-3879F97B5CBC}" type="slidenum">
+              <a:rPr lang="en-US"/>
+              <a:t>8</a:t>
+            </a:fld>
+            <a:endParaRPr lang="en-US"/>
+          </a:p>
+        </p:txBody>
+      </p:sp>
+    </p:spTree>
+    <p:extLst>
+      <p:ext uri="{BB962C8B-B14F-4D97-AF65-F5344CB8AC3E}">
+        <p14:creationId xmlns:p14="http://schemas.microsoft.com/office/powerpoint/2010/main" val="1024086991"/>
+      </p:ext>
+    </p:extLst>
+  </p:cSld>
+  <p:clrMapOvr>
+    <a:masterClrMapping/>
+  </p:clrMapOvr>
+</p:notes>
+</file>
+
 <file path=ppt/slideLayouts/slideLayout1.xml><?xml version="1.0" encoding="utf-8"?>
 <p:sldLayout xmlns:a="http://schemas.openxmlformats.org/drawingml/2006/main" xmlns:r="http://schemas.openxmlformats.org/officeDocument/2006/relationships" xmlns:p="http://schemas.openxmlformats.org/presentationml/2006/main" preserve="1">
   <p:cSld name="DEFAULT">
@@ -1411,8 +1501,362 @@
   <p:cSld name="TITLE">
     <p:bg>
       <p:bgPr>
+        <a:blipFill dpi="0" rotWithShape="1">
+          <a:blip r:embed="rId2">
+            <a:lum/>
+          </a:blip>
+          <a:srcRect/>
+          <a:stretch>
+            <a:fillRect/>
+          </a:stretch>
+        </a:blipFill>
+        <a:effectLst/>
+      </p:bgPr>
+    </p:bg>
+    <p:spTree>
+      <p:nvGrpSpPr>
+        <p:cNvPr id="1" name=""/>
+        <p:cNvGrpSpPr/>
+        <p:nvPr/>
+      </p:nvGrpSpPr>
+      <p:grpSpPr>
+        <a:xfrm>
+          <a:off x="0" y="0"/>
+          <a:ext cx="0" cy="0"/>
+          <a:chOff x="0" y="0"/>
+          <a:chExt cx="0" cy="0"/>
+        </a:xfrm>
+      </p:grpSpPr>
+      <p:pic>
+        <p:nvPicPr>
+          <p:cNvPr id="2" name="Image 0" descr="Huy hiệu mẫu (thay bằng logo của trường)">    </p:cNvPr>
+          <p:cNvPicPr>
+            <a:picLocks noChangeAspect="1"/>
+          </p:cNvPicPr>
+          <p:nvPr/>
+        </p:nvPicPr>
+        <p:blipFill>
+          <a:blip r:embed="rId1"/>
+          <a:stretch>
+            <a:fillRect/>
+          </a:stretch>
+        </p:blipFill>
+        <p:spPr>
+          <a:xfrm>
+            <a:off x="548640" y="411480"/>
+            <a:ext cx="502920" cy="502920"/>
+          </a:xfrm>
+          <a:prstGeom prst="rect">
+            <a:avLst/>
+          </a:prstGeom>
+        </p:spPr>
+      </p:pic>
+      <p:sp>
+        <p:nvSpPr>
+          <p:cNvPr id="3" name="Text 0"/>
+          <p:cNvSpPr/>
+          <p:nvPr/>
+        </p:nvSpPr>
+        <p:spPr>
+          <a:xfrm>
+            <a:off x="1188720" y="411480"/>
+            <a:ext cx="5486400" cy="502920"/>
+          </a:xfrm>
+          <a:prstGeom prst="rect">
+            <a:avLst/>
+          </a:prstGeom>
+          <a:noFill/>
+          <a:ln/>
+        </p:spPr>
+        <p:txBody>
+          <a:bodyPr wrap="square" lIns="0" tIns="0" rIns="0" bIns="0" rtlCol="0" anchor="ctr"/>
+          <a:lstStyle/>
+          <a:p>
+            <a:pPr indent="0" marL="0">
+              <a:buNone/>
+            </a:pPr>
+            <a:r>
+              <a:rPr lang="en-US" sz="1400" b="1" dirty="0">
+                <a:solidFill>
+                  <a:srgbClr val="FFFFFF"/>
+                </a:solidFill>
+              </a:rPr>
+              <a:t>Trường Đại học Mẫu A (tên mẫu)</a:t>
+            </a:r>
+            <a:endParaRPr lang="en-US" sz="1400" dirty="0"/>
+          </a:p>
+        </p:txBody>
+      </p:sp>
+      <p:sp>
+        <p:nvSpPr>
+          <p:cNvPr id="4" name="Text 1"/>
+          <p:cNvSpPr/>
+          <p:nvPr>
+            <p:ph idx="102" type="title" hasCustomPrompt="1"/>
+          </p:nvPr>
+        </p:nvSpPr>
+        <p:spPr>
+          <a:xfrm>
+            <a:off x="548640" y="1417320"/>
+            <a:ext cx="6035040" cy="1554480"/>
+          </a:xfrm>
+          <a:prstGeom prst="rect">
+            <a:avLst/>
+          </a:prstGeom>
+          <a:noFill/>
+          <a:ln/>
+        </p:spPr>
+        <p:txBody>
+          <a:bodyPr wrap="square" rtlCol="0"/>
+          <a:lstStyle>
+            <a:lvl1pPr algn="l" indent="0" marL="0">
+              <a:buNone/>
+              <a:defRPr lang="en-US" sz="3600" b="1" dirty="0">
+                <a:solidFill>
+                  <a:srgbClr val="FFFFFF"/>
+                </a:solidFill>
+              </a:defRPr>
+            </a:lvl1pPr>
+          </a:lstStyle>
+          <a:p>
+            <a:pPr algn="l" indent="0" marL="0">
+              <a:buNone/>
+            </a:pPr>
+            <a:endParaRPr lang="en-US" sz="3600" dirty="0"/>
+          </a:p>
+        </p:txBody>
+      </p:sp>
+      <p:sp>
+        <p:nvSpPr>
+          <p:cNvPr id="5" name="Text 1"/>
+          <p:cNvSpPr/>
+          <p:nvPr>
+            <p:ph idx="103" type="body" hasCustomPrompt="1"/>
+          </p:nvPr>
+        </p:nvSpPr>
+        <p:spPr>
+          <a:xfrm>
+            <a:off x="548640" y="3154680"/>
+            <a:ext cx="6035040" cy="1097280"/>
+          </a:xfrm>
+          <a:prstGeom prst="rect">
+            <a:avLst/>
+          </a:prstGeom>
+          <a:noFill/>
+          <a:ln/>
+        </p:spPr>
+        <p:txBody>
+          <a:bodyPr wrap="square" rtlCol="0"/>
+          <a:lstStyle>
+            <a:lvl1pPr algn="l" indent="0" marL="0">
+              <a:buNone/>
+              <a:defRPr lang="en-US" sz="1800" dirty="0">
+                <a:solidFill>
+                  <a:srgbClr val="D6E2F0"/>
+                </a:solidFill>
+              </a:defRPr>
+            </a:lvl1pPr>
+          </a:lstStyle>
+          <a:p>
+            <a:pPr algn="l" indent="0" marL="0">
+              <a:buNone/>
+            </a:pPr>
+            <a:endParaRPr lang="en-US" sz="1800" dirty="0"/>
+          </a:p>
+        </p:txBody>
+      </p:sp>
+    </p:spTree>
+  </p:cSld>
+  <p:clrMapOvr>
+    <a:masterClrMapping/>
+  </p:clrMapOvr>
+</p:sldLayout>
+</file>
+
+<file path=ppt/slideLayouts/slideLayout3.xml><?xml version="1.0" encoding="utf-8"?>
+<p:sldLayout xmlns:a="http://schemas.openxmlformats.org/drawingml/2006/main" xmlns:r="http://schemas.openxmlformats.org/officeDocument/2006/relationships" xmlns:p="http://schemas.openxmlformats.org/presentationml/2006/main" preserve="1">
+  <p:cSld name="CLOSING">
+    <p:bg>
+      <p:bgPr>
+        <a:blipFill dpi="0" rotWithShape="1">
+          <a:blip r:embed="rId2">
+            <a:lum/>
+          </a:blip>
+          <a:srcRect/>
+          <a:stretch>
+            <a:fillRect/>
+          </a:stretch>
+        </a:blipFill>
+        <a:effectLst/>
+      </p:bgPr>
+    </p:bg>
+    <p:spTree>
+      <p:nvGrpSpPr>
+        <p:cNvPr id="1" name=""/>
+        <p:cNvGrpSpPr/>
+        <p:nvPr/>
+      </p:nvGrpSpPr>
+      <p:grpSpPr>
+        <a:xfrm>
+          <a:off x="0" y="0"/>
+          <a:ext cx="0" cy="0"/>
+          <a:chOff x="0" y="0"/>
+          <a:chExt cx="0" cy="0"/>
+        </a:xfrm>
+      </p:grpSpPr>
+      <p:pic>
+        <p:nvPicPr>
+          <p:cNvPr id="2" name="Image 0" descr="Huy hiệu mẫu (thay bằng logo của trường)">    </p:cNvPr>
+          <p:cNvPicPr>
+            <a:picLocks noChangeAspect="1"/>
+          </p:cNvPicPr>
+          <p:nvPr/>
+        </p:nvPicPr>
+        <p:blipFill>
+          <a:blip r:embed="rId1"/>
+          <a:stretch>
+            <a:fillRect/>
+          </a:stretch>
+        </p:blipFill>
+        <p:spPr>
+          <a:xfrm>
+            <a:off x="548640" y="411480"/>
+            <a:ext cx="502920" cy="502920"/>
+          </a:xfrm>
+          <a:prstGeom prst="rect">
+            <a:avLst/>
+          </a:prstGeom>
+        </p:spPr>
+      </p:pic>
+      <p:sp>
+        <p:nvSpPr>
+          <p:cNvPr id="3" name="Text 0"/>
+          <p:cNvSpPr/>
+          <p:nvPr/>
+        </p:nvSpPr>
+        <p:spPr>
+          <a:xfrm>
+            <a:off x="1188720" y="411480"/>
+            <a:ext cx="5486400" cy="502920"/>
+          </a:xfrm>
+          <a:prstGeom prst="rect">
+            <a:avLst/>
+          </a:prstGeom>
+          <a:noFill/>
+          <a:ln/>
+        </p:spPr>
+        <p:txBody>
+          <a:bodyPr wrap="square" lIns="0" tIns="0" rIns="0" bIns="0" rtlCol="0" anchor="ctr"/>
+          <a:lstStyle/>
+          <a:p>
+            <a:pPr indent="0" marL="0">
+              <a:buNone/>
+            </a:pPr>
+            <a:r>
+              <a:rPr lang="en-US" sz="1400" b="1" dirty="0">
+                <a:solidFill>
+                  <a:srgbClr val="FFFFFF"/>
+                </a:solidFill>
+              </a:rPr>
+              <a:t>Trường Đại học Mẫu A (tên mẫu)</a:t>
+            </a:r>
+            <a:endParaRPr lang="en-US" sz="1400" dirty="0"/>
+          </a:p>
+        </p:txBody>
+      </p:sp>
+      <p:sp>
+        <p:nvSpPr>
+          <p:cNvPr id="4" name="Text 1"/>
+          <p:cNvSpPr/>
+          <p:nvPr>
+            <p:ph idx="102" type="title" hasCustomPrompt="1"/>
+          </p:nvPr>
+        </p:nvSpPr>
+        <p:spPr>
+          <a:xfrm>
+            <a:off x="548640" y="1417320"/>
+            <a:ext cx="6035040" cy="1554480"/>
+          </a:xfrm>
+          <a:prstGeom prst="rect">
+            <a:avLst/>
+          </a:prstGeom>
+          <a:noFill/>
+          <a:ln/>
+        </p:spPr>
+        <p:txBody>
+          <a:bodyPr wrap="square" rtlCol="0"/>
+          <a:lstStyle>
+            <a:lvl1pPr algn="l" indent="0" marL="0">
+              <a:buNone/>
+              <a:defRPr lang="en-US" sz="3600" b="1" dirty="0">
+                <a:solidFill>
+                  <a:srgbClr val="FFFFFF"/>
+                </a:solidFill>
+              </a:defRPr>
+            </a:lvl1pPr>
+          </a:lstStyle>
+          <a:p>
+            <a:pPr algn="l" indent="0" marL="0">
+              <a:buNone/>
+            </a:pPr>
+            <a:endParaRPr lang="en-US" sz="3600" dirty="0"/>
+          </a:p>
+        </p:txBody>
+      </p:sp>
+      <p:sp>
+        <p:nvSpPr>
+          <p:cNvPr id="5" name="Text 1"/>
+          <p:cNvSpPr/>
+          <p:nvPr>
+            <p:ph idx="103" type="body" hasCustomPrompt="1"/>
+          </p:nvPr>
+        </p:nvSpPr>
+        <p:spPr>
+          <a:xfrm>
+            <a:off x="548640" y="3154680"/>
+            <a:ext cx="6035040" cy="1097280"/>
+          </a:xfrm>
+          <a:prstGeom prst="rect">
+            <a:avLst/>
+          </a:prstGeom>
+          <a:noFill/>
+          <a:ln/>
+        </p:spPr>
+        <p:txBody>
+          <a:bodyPr wrap="square" rtlCol="0"/>
+          <a:lstStyle>
+            <a:lvl1pPr algn="l" indent="0" marL="0">
+              <a:buNone/>
+              <a:defRPr lang="en-US" sz="1800" dirty="0">
+                <a:solidFill>
+                  <a:srgbClr val="D6E2F0"/>
+                </a:solidFill>
+              </a:defRPr>
+            </a:lvl1pPr>
+          </a:lstStyle>
+          <a:p>
+            <a:pPr algn="l" indent="0" marL="0">
+              <a:buNone/>
+            </a:pPr>
+            <a:endParaRPr lang="en-US" sz="1800" dirty="0"/>
+          </a:p>
+        </p:txBody>
+      </p:sp>
+    </p:spTree>
+  </p:cSld>
+  <p:clrMapOvr>
+    <a:masterClrMapping/>
+  </p:clrMapOvr>
+</p:sldLayout>
+</file>
+
+<file path=ppt/slideLayouts/slideLayout4.xml><?xml version="1.0" encoding="utf-8"?>
+<p:sldLayout xmlns:a="http://schemas.openxmlformats.org/drawingml/2006/main" xmlns:r="http://schemas.openxmlformats.org/officeDocument/2006/relationships" xmlns:p="http://schemas.openxmlformats.org/presentationml/2006/main" preserve="1">
+  <p:cSld name="SECTION">
+    <p:bg>
+      <p:bgPr>
         <a:solidFill>
-          <a:srgbClr val="0F3D3E"/>
+          <a:srgbClr val="0B2A4A"/>
         </a:solidFill>
       </p:bgPr>
     </p:bg>
@@ -1435,13 +1879,13 @@
           <p:cNvPr id="2" name="Text 0"/>
           <p:cNvSpPr/>
           <p:nvPr>
-            <p:ph idx="100" type="title" hasCustomPrompt="1"/>
+            <p:ph idx="100" type="body" hasCustomPrompt="1"/>
           </p:nvPr>
         </p:nvSpPr>
         <p:spPr>
           <a:xfrm>
-            <a:off x="548640" y="1371600"/>
-            <a:ext cx="8046720" cy="1371600"/>
+            <a:off x="548640" y="1097280"/>
+            <a:ext cx="2286000" cy="1463040"/>
           </a:xfrm>
           <a:prstGeom prst="rect">
             <a:avLst/>
@@ -1454,10 +1898,13 @@
           <a:lstStyle>
             <a:lvl1pPr algn="l" indent="0" marL="0">
               <a:buNone/>
-              <a:defRPr lang="en-US" sz="3600" b="1" dirty="0">
-                <a:solidFill>
-                  <a:srgbClr val="FFFFFF"/>
-                </a:solidFill>
+              <a:defRPr lang="en-US" sz="8000" b="1" dirty="0">
+                <a:solidFill>
+                  <a:srgbClr val="B8902B"/>
+                </a:solidFill>
+                <a:latin typeface="Cambria" pitchFamily="34" charset="0"/>
+                <a:ea typeface="Cambria" pitchFamily="34" charset="-122"/>
+                <a:cs typeface="Cambria" pitchFamily="34" charset="-120"/>
               </a:defRPr>
             </a:lvl1pPr>
           </a:lstStyle>
@@ -1465,7 +1912,7 @@
             <a:pPr algn="l" indent="0" marL="0">
               <a:buNone/>
             </a:pPr>
-            <a:endParaRPr lang="en-US" sz="3600" dirty="0"/>
+            <a:endParaRPr lang="en-US" sz="8000" dirty="0"/>
           </a:p>
         </p:txBody>
       </p:sp>
@@ -1474,13 +1921,13 @@
           <p:cNvPr id="3" name="Text 0"/>
           <p:cNvSpPr/>
           <p:nvPr>
-            <p:ph idx="101" type="body" hasCustomPrompt="1"/>
+            <p:ph idx="101" type="title" hasCustomPrompt="1"/>
           </p:nvPr>
         </p:nvSpPr>
         <p:spPr>
           <a:xfrm>
-            <a:off x="548640" y="2926080"/>
-            <a:ext cx="8046720" cy="914400"/>
+            <a:off x="2926080" y="1097280"/>
+            <a:ext cx="5669280" cy="1463040"/>
           </a:xfrm>
           <a:prstGeom prst="rect">
             <a:avLst/>
@@ -1493,9 +1940,9 @@
           <a:lstStyle>
             <a:lvl1pPr algn="l" indent="0" marL="0">
               <a:buNone/>
-              <a:defRPr lang="en-US" sz="1800" dirty="0">
-                <a:solidFill>
-                  <a:srgbClr val="CFE3E1"/>
+              <a:defRPr lang="en-US" sz="3400" b="1" dirty="0">
+                <a:solidFill>
+                  <a:srgbClr val="FFFFFF"/>
                 </a:solidFill>
               </a:defRPr>
             </a:lvl1pPr>
@@ -1504,7 +1951,7 @@
             <a:pPr algn="l" indent="0" marL="0">
               <a:buNone/>
             </a:pPr>
-            <a:endParaRPr lang="en-US" sz="1800" dirty="0"/>
+            <a:endParaRPr lang="en-US" sz="3400" dirty="0"/>
           </a:p>
         </p:txBody>
       </p:sp>
@@ -1516,7 +1963,7 @@
 </p:sldLayout>
 </file>
 
-<file path=ppt/slideLayouts/slideLayout3.xml><?xml version="1.0" encoding="utf-8"?>
+<file path=ppt/slideLayouts/slideLayout5.xml><?xml version="1.0" encoding="utf-8"?>
 <p:sldLayout xmlns:a="http://schemas.openxmlformats.org/drawingml/2006/main" xmlns:r="http://schemas.openxmlformats.org/officeDocument/2006/relationships" xmlns:p="http://schemas.openxmlformats.org/presentationml/2006/main" preserve="1">
   <p:cSld name="CONTENT">
     <p:bg>
@@ -1550,8 +1997,8 @@
         </p:nvSpPr>
         <p:spPr>
           <a:xfrm>
-            <a:off x="457200" y="274320"/>
-            <a:ext cx="8229600" cy="868680"/>
+            <a:off x="548640" y="274320"/>
+            <a:ext cx="8046720" cy="868680"/>
           </a:xfrm>
           <a:prstGeom prst="rect">
             <a:avLst/>
@@ -1566,7 +2013,7 @@
               <a:buNone/>
               <a:defRPr lang="en-US" sz="2800" b="1" dirty="0">
                 <a:solidFill>
-                  <a:srgbClr val="0F3D3E"/>
+                  <a:srgbClr val="0B2A4A"/>
                 </a:solidFill>
               </a:defRPr>
             </a:lvl1pPr>
@@ -1576,6 +2023,87 @@
               <a:buNone/>
             </a:pPr>
             <a:endParaRPr lang="en-US" sz="2800" dirty="0"/>
+          </a:p>
+        </p:txBody>
+      </p:sp>
+      <p:sp>
+        <p:nvSpPr>
+          <p:cNvPr id="3" name="Text 0"/>
+          <p:cNvSpPr/>
+          <p:nvPr/>
+        </p:nvSpPr>
+        <p:spPr>
+          <a:xfrm>
+            <a:off x="548640" y="4727448"/>
+            <a:ext cx="5943600" cy="274320"/>
+          </a:xfrm>
+          <a:prstGeom prst="rect">
+            <a:avLst/>
+          </a:prstGeom>
+          <a:noFill/>
+          <a:ln/>
+        </p:spPr>
+        <p:txBody>
+          <a:bodyPr wrap="square" lIns="0" tIns="0" rIns="0" bIns="0" rtlCol="0" anchor="ctr"/>
+          <a:lstStyle/>
+          <a:p>
+            <a:pPr indent="0" marL="0">
+              <a:buNone/>
+            </a:pPr>
+            <a:r>
+              <a:rPr lang="en-US" sz="1100" dirty="0">
+                <a:solidFill>
+                  <a:srgbClr val="6B7A90"/>
+                </a:solidFill>
+              </a:rPr>
+              <a:t>Campaign brief · Tuyển sinh đợt 1 năm 2027</a:t>
+            </a:r>
+            <a:endParaRPr lang="en-US" sz="1100" dirty="0"/>
+          </a:p>
+        </p:txBody>
+      </p:sp>
+      <p:sp>
+        <p:nvSpPr>
+          <p:cNvPr id="25" name="Slide Number Placeholder 0"/>
+          <p:cNvSpPr>
+            <a:spLocks noGrp="1"/>
+          </p:cNvSpPr>
+          <p:nvPr>
+            <p:ph type="sldNum" sz="quarter" idx="4294967295"/>
+          </p:nvPr>
+        </p:nvSpPr>
+        <p:spPr>
+          <a:xfrm>
+            <a:off x="8138160" y="4727448"/>
+            <a:ext cx="457200" cy="274320"/>
+          </a:xfrm>
+          <a:prstGeom prst="rect">
+            <a:avLst/>
+          </a:prstGeom>
+          <a:extLst>
+            <a:ext uri="{C572A759-6A51-4108-AA02-DFA0A04FC94B}">
+              <ma14:wrappingTextBoxFlag xmlns:ma14="http://schemas.microsoft.com/office/mac/drawingml/2011/main" val="0"/>
+            </a:ext>
+          </a:extLst>
+        </p:spPr>
+        <p:txBody>
+          <a:bodyPr/>
+          <a:lstStyle>
+            <a:lvl1pPr>
+              <a:defRPr sz="1100">
+                <a:solidFill>
+                  <a:srgbClr val="6B7A90"/>
+                </a:solidFill>
+              </a:defRPr>
+            </a:lvl1pPr>
+          </a:lstStyle>
+          <a:p>
+            <a:pPr algn="r"/>
+            <a:fld id="{F7021451-1387-4CA6-816F-3879F97B5CBC}" type="slidenum">
+              <a:rPr b="0" lang="en-US"/>
+              <a:t>1005</a:t>
+            </a:fld>
+            <a:endParaRPr lang="en-US"/>
           </a:p>
         </p:txBody>
       </p:sp>
@@ -1604,6 +2132,51 @@
           <a:chExt cx="0" cy="0"/>
         </a:xfrm>
       </p:grpSpPr>
+      <p:sp>
+        <p:nvSpPr>
+          <p:cNvPr id="25" name="Slide Number Placeholder 0"/>
+          <p:cNvSpPr>
+            <a:spLocks noGrp="1"/>
+          </p:cNvSpPr>
+          <p:nvPr>
+            <p:ph type="sldNum" sz="quarter" idx="4294967295"/>
+          </p:nvPr>
+        </p:nvSpPr>
+        <p:spPr>
+          <a:xfrm>
+            <a:off x="8138160" y="4727448"/>
+            <a:ext cx="457200" cy="274320"/>
+          </a:xfrm>
+          <a:prstGeom prst="rect">
+            <a:avLst/>
+          </a:prstGeom>
+          <a:extLst>
+            <a:ext uri="{C572A759-6A51-4108-AA02-DFA0A04FC94B}">
+              <ma14:wrappingTextBoxFlag xmlns:ma14="http://schemas.microsoft.com/office/mac/drawingml/2011/main" val="0"/>
+            </a:ext>
+          </a:extLst>
+        </p:spPr>
+        <p:txBody>
+          <a:bodyPr/>
+          <a:lstStyle>
+            <a:lvl1pPr>
+              <a:defRPr sz="1100">
+                <a:solidFill>
+                  <a:srgbClr val="6B7A90"/>
+                </a:solidFill>
+              </a:defRPr>
+            </a:lvl1pPr>
+          </a:lstStyle>
+          <a:p>
+            <a:pPr algn="r"/>
+            <a:fld id="{F7021451-1387-4CA6-816F-3879F97B5CBC}" type="slidenum">
+              <a:rPr b="0" lang="en-US"/>
+              <a:t>null</a:t>
+            </a:fld>
+            <a:endParaRPr lang="en-US"/>
+          </a:p>
+        </p:txBody>
+      </p:sp>
     </p:spTree>
   </p:cSld>
   <p:clrMap bg1="lt1" tx1="dk1" bg2="lt2" tx2="dk2" accent1="accent1" accent2="accent2" accent3="accent3" accent4="accent4" accent5="accent5" accent6="accent6" hlink="hlink" folHlink="folHlink"/>
@@ -1611,6 +2184,8 @@
     <p:sldLayoutId id="2147483649" r:id="rId1"/>
     <p:sldLayoutId id="2147483650" r:id="rId2"/>
     <p:sldLayoutId id="2147483651" r:id="rId3"/>
+    <p:sldLayoutId id="2147483652" r:id="rId4"/>
+    <p:sldLayoutId id="2147483653" r:id="rId5"/>
   </p:sldLayoutIdLst>
   <p:hf sldNum="0" hdr="0" ftr="0" dt="0"/>
   <p:txStyles>
@@ -1885,16 +2460,16 @@
       </p:grpSpPr>
       <p:sp>
         <p:nvSpPr>
-          <p:cNvPr id="2" name="Text 0"/>
+          <p:cNvPr id="2" name="Text 1"/>
           <p:cNvSpPr/>
           <p:nvPr>
-            <p:ph idx="100" type="title" hasCustomPrompt="1"/>
+            <p:ph idx="102" type="title" hasCustomPrompt="1"/>
           </p:nvPr>
         </p:nvSpPr>
         <p:spPr>
           <a:xfrm>
-            <a:off x="548640" y="1371600"/>
-            <a:ext cx="8046720" cy="1371600"/>
+            <a:off x="548640" y="1417320"/>
+            <a:ext cx="6035040" cy="1554480"/>
           </a:xfrm>
           <a:prstGeom prst="rect">
             <a:avLst/>
@@ -1923,16 +2498,16 @@
       </p:sp>
       <p:sp>
         <p:nvSpPr>
-          <p:cNvPr id="3" name="Text 0"/>
+          <p:cNvPr id="3" name="Text 1"/>
           <p:cNvSpPr/>
           <p:nvPr>
-            <p:ph idx="101" type="body" hasCustomPrompt="1"/>
+            <p:ph idx="103" type="body" hasCustomPrompt="1"/>
           </p:nvPr>
         </p:nvSpPr>
         <p:spPr>
           <a:xfrm>
-            <a:off x="548640" y="2926080"/>
-            <a:ext cx="8046720" cy="914400"/>
+            <a:off x="548640" y="3154680"/>
+            <a:ext cx="6035040" cy="1097280"/>
           </a:xfrm>
           <a:prstGeom prst="rect">
             <a:avLst/>
@@ -1950,10 +2525,10 @@
             <a:r>
               <a:rPr lang="en-US" sz="1800" dirty="0">
                 <a:solidFill>
-                  <a:srgbClr val="CFE3E1"/>
+                  <a:srgbClr val="D6E2F0"/>
                 </a:solidFill>
               </a:rPr>
-              <a:t>Campaign brief · 01/02/2027–30/06/2027</a:t>
+              <a:t>Campaign brief · Thời gian chạy: 01/02/2027–30/06/2027</a:t>
             </a:r>
             <a:endParaRPr lang="en-US" sz="1800" dirty="0"/>
           </a:p>
@@ -1994,8 +2569,8 @@
         </p:nvSpPr>
         <p:spPr>
           <a:xfrm>
-            <a:off x="457200" y="274320"/>
-            <a:ext cx="8229600" cy="868680"/>
+            <a:off x="548640" y="274320"/>
+            <a:ext cx="8046720" cy="868680"/>
           </a:xfrm>
           <a:prstGeom prst="rect">
             <a:avLst/>
@@ -2013,7 +2588,7 @@
             <a:r>
               <a:rPr lang="en-US" sz="2800" b="1" dirty="0">
                 <a:solidFill>
-                  <a:srgbClr val="0F3D3E"/>
+                  <a:srgbClr val="0B2A4A"/>
                 </a:solidFill>
               </a:rPr>
               <a:t>Mục tiêu: 1.500 hồ sơ đăng ký trước 30/06/2027</a:t>
@@ -2030,20 +2605,20 @@
         </p:nvSpPr>
         <p:spPr>
           <a:xfrm>
-            <a:off x="457200" y="1371600"/>
-            <a:ext cx="3931920" cy="1737360"/>
+            <a:off x="548640" y="1325880"/>
+            <a:ext cx="3840480" cy="2926080"/>
           </a:xfrm>
           <a:prstGeom prst="roundRect">
             <a:avLst>
-              <a:gd name="adj" fmla="val 5263"/>
+              <a:gd name="adj" fmla="val 2500"/>
             </a:avLst>
           </a:prstGeom>
           <a:solidFill>
-            <a:srgbClr val="EEF3F2"/>
+            <a:srgbClr val="F1F4F8"/>
           </a:solidFill>
           <a:ln w="12700">
             <a:solidFill>
-              <a:srgbClr val="EEF3F2"/>
+              <a:srgbClr val="F1F4F8"/>
             </a:solidFill>
             <a:prstDash val="solid"/>
           </a:ln>
@@ -2051,14 +2626,63 @@
       </p:sp>
       <p:sp>
         <p:nvSpPr>
-          <p:cNvPr id="5" name="so-lieu"/>
+          <p:cNvPr id="5" name="o-bieu-tuong"/>
+          <p:cNvSpPr/>
+          <p:nvPr/>
+        </p:nvSpPr>
+        <p:spPr>
+          <a:xfrm>
+            <a:off x="777240" y="1554480"/>
+            <a:ext cx="548640" cy="548640"/>
+          </a:xfrm>
+          <a:prstGeom prst="ellipse">
+            <a:avLst/>
+          </a:prstGeom>
+          <a:solidFill>
+            <a:srgbClr val="1F4E8C"/>
+          </a:solidFill>
+          <a:ln w="12700">
+            <a:solidFill>
+              <a:srgbClr val="1F4E8C"/>
+            </a:solidFill>
+            <a:prstDash val="solid"/>
+          </a:ln>
+        </p:spPr>
+      </p:sp>
+      <p:pic>
+        <p:nvPicPr>
+          <p:cNvPr id="6" name="bieu-tuong" descr="Biểu tượng minh họa">    </p:cNvPr>
+          <p:cNvPicPr>
+            <a:picLocks noChangeAspect="1"/>
+          </p:cNvPicPr>
+          <p:nvPr/>
+        </p:nvPicPr>
+        <p:blipFill>
+          <a:blip r:embed="rId1"/>
+          <a:stretch>
+            <a:fillRect/>
+          </a:stretch>
+        </p:blipFill>
+        <p:spPr>
+          <a:xfrm>
+            <a:off x="914400" y="1691640"/>
+            <a:ext cx="274320" cy="274320"/>
+          </a:xfrm>
+          <a:prstGeom prst="rect">
+            <a:avLst/>
+          </a:prstGeom>
+        </p:spPr>
+      </p:pic>
+      <p:sp>
+        <p:nvSpPr>
+          <p:cNvPr id="7" name="so-lieu"/>
           <p:cNvSpPr txBox="1"/>
           <p:nvPr/>
         </p:nvSpPr>
         <p:spPr>
           <a:xfrm>
-            <a:off x="594360" y="1508760"/>
-            <a:ext cx="3657600" cy="822960"/>
+            <a:off x="777240" y="2240280"/>
+            <a:ext cx="3383280" cy="777240"/>
           </a:xfrm>
           <a:prstGeom prst="rect">
             <a:avLst/>
@@ -2076,7 +2700,7 @@
             <a:r>
               <a:rPr lang="en-US" sz="4000" b="1" dirty="0">
                 <a:solidFill>
-                  <a:srgbClr val="0F6E6E"/>
+                  <a:srgbClr val="1F4E8C"/>
                 </a:solidFill>
                 <a:latin typeface="Cambria" pitchFamily="34" charset="0"/>
                 <a:ea typeface="Cambria" pitchFamily="34" charset="-122"/>
@@ -2090,14 +2714,14 @@
       </p:sp>
       <p:sp>
         <p:nvSpPr>
-          <p:cNvPr id="6" name="nhan"/>
+          <p:cNvPr id="8" name="nhan"/>
           <p:cNvSpPr txBox="1"/>
           <p:nvPr/>
         </p:nvSpPr>
         <p:spPr>
           <a:xfrm>
-            <a:off x="594360" y="2331720"/>
-            <a:ext cx="3657600" cy="685800"/>
+            <a:off x="777240" y="3063240"/>
+            <a:ext cx="3383280" cy="1051560"/>
           </a:xfrm>
           <a:prstGeom prst="rect">
             <a:avLst/>
@@ -2113,54 +2737,78 @@
               <a:buNone/>
             </a:pPr>
             <a:r>
-              <a:rPr lang="en-US" sz="1400" dirty="0">
-                <a:solidFill>
-                  <a:srgbClr val="1B1F2A"/>
+              <a:rPr lang="en-US" sz="1600" dirty="0">
+                <a:solidFill>
+                  <a:srgbClr val="1A2433"/>
                 </a:solidFill>
               </a:rPr>
               <a:t>hồ sơ đăng ký xét tuyển, hạn 30/06/2027</a:t>
             </a:r>
-            <a:endParaRPr lang="en-US" sz="1400" dirty="0"/>
-          </a:p>
-        </p:txBody>
-      </p:sp>
-      <p:sp>
-        <p:nvSpPr>
-          <p:cNvPr id="7" name="luu-y"/>
+            <a:endParaRPr lang="en-US" sz="1600" dirty="0"/>
+          </a:p>
+        </p:txBody>
+      </p:sp>
+      <p:sp>
+        <p:nvSpPr>
+          <p:cNvPr id="9" name="luu-y"/>
           <p:cNvSpPr/>
           <p:nvPr/>
         </p:nvSpPr>
         <p:spPr>
           <a:xfrm>
-            <a:off x="4754880" y="1371600"/>
-            <a:ext cx="3931920" cy="1737360"/>
+            <a:off x="4754880" y="1325880"/>
+            <a:ext cx="3840480" cy="2926080"/>
           </a:xfrm>
           <a:prstGeom prst="roundRect">
             <a:avLst>
-              <a:gd name="adj" fmla="val 5263"/>
+              <a:gd name="adj" fmla="val 2500"/>
             </a:avLst>
           </a:prstGeom>
           <a:solidFill>
-            <a:srgbClr val="FBEEDD"/>
+            <a:srgbClr val="FBF1E1"/>
           </a:solidFill>
           <a:ln w="12700">
             <a:solidFill>
-              <a:srgbClr val="D9822B"/>
+              <a:srgbClr val="B8902B"/>
             </a:solidFill>
             <a:prstDash val="solid"/>
           </a:ln>
         </p:spPr>
       </p:sp>
-      <p:sp>
-        <p:nvSpPr>
-          <p:cNvPr id="8" name="luu-y-chu"/>
+      <p:pic>
+        <p:nvPicPr>
+          <p:cNvPr id="10" name="bieu-tuong" descr="Biểu tượng">    </p:cNvPr>
+          <p:cNvPicPr>
+            <a:picLocks noChangeAspect="1"/>
+          </p:cNvPicPr>
+          <p:nvPr/>
+        </p:nvPicPr>
+        <p:blipFill>
+          <a:blip r:embed="rId2"/>
+          <a:stretch>
+            <a:fillRect/>
+          </a:stretch>
+        </p:blipFill>
+        <p:spPr>
+          <a:xfrm>
+            <a:off x="4937760" y="1527048"/>
+            <a:ext cx="274320" cy="274320"/>
+          </a:xfrm>
+          <a:prstGeom prst="rect">
+            <a:avLst/>
+          </a:prstGeom>
+        </p:spPr>
+      </p:pic>
+      <p:sp>
+        <p:nvSpPr>
+          <p:cNvPr id="11" name="nhan-xet-tieu-de"/>
           <p:cNvSpPr txBox="1"/>
           <p:nvPr/>
         </p:nvSpPr>
         <p:spPr>
           <a:xfrm>
-            <a:off x="4892040" y="1481328"/>
-            <a:ext cx="3657600" cy="1554480"/>
+            <a:off x="5303520" y="1508760"/>
+            <a:ext cx="3108960" cy="329184"/>
           </a:xfrm>
           <a:prstGeom prst="rect">
             <a:avLst/>
@@ -2169,7 +2817,7 @@
           <a:ln/>
         </p:spPr>
         <p:txBody>
-          <a:bodyPr wrap="square" lIns="0" tIns="0" rIns="0" bIns="0" rtlCol="0" anchor="t"/>
+          <a:bodyPr wrap="square" lIns="0" tIns="0" rIns="0" bIns="0" rtlCol="0" anchor="ctr"/>
           <a:lstStyle/>
           <a:p>
             <a:pPr indent="0" marL="0">
@@ -2178,26 +2826,115 @@
             <a:r>
               <a:rPr lang="en-US" sz="1800" b="1" dirty="0">
                 <a:solidFill>
-                  <a:srgbClr val="1B1F2A"/>
+                  <a:srgbClr val="A23B3B"/>
                 </a:solidFill>
               </a:rPr>
               <a:t>Chưa đo được</a:t>
             </a:r>
             <a:endParaRPr lang="en-US" sz="1800" dirty="0"/>
           </a:p>
-          <a:p>
-            <a:pPr indent="0" marL="0">
-              <a:buNone/>
+        </p:txBody>
+      </p:sp>
+      <p:sp>
+        <p:nvSpPr>
+          <p:cNvPr id="12" name="nhan-xet-chu"/>
+          <p:cNvSpPr txBox="1"/>
+          <p:nvPr/>
+        </p:nvSpPr>
+        <p:spPr>
+          <a:xfrm>
+            <a:off x="4937760" y="1965960"/>
+            <a:ext cx="3474720" cy="2194560"/>
+          </a:xfrm>
+          <a:prstGeom prst="rect">
+            <a:avLst/>
+          </a:prstGeom>
+          <a:noFill/>
+          <a:ln/>
+        </p:spPr>
+        <p:txBody>
+          <a:bodyPr wrap="square" lIns="0" tIns="0" rIns="0" bIns="0" rtlCol="0" anchor="t"/>
+          <a:lstStyle/>
+          <a:p>
+            <a:pPr marL="342900" indent="-342900">
+              <a:spcAft>
+                <a:spcPts val="800"/>
+              </a:spcAft>
+              <a:buSzPct val="100000"/>
+              <a:buChar char="•"/>
             </a:pPr>
             <a:r>
-              <a:rPr lang="en-US" sz="1400" dirty="0">
-                <a:solidFill>
-                  <a:srgbClr val="1B1F2A"/>
+              <a:rPr lang="en-US" sz="1600" dirty="0">
+                <a:solidFill>
+                  <a:srgbClr val="1A2433"/>
                 </a:solidFill>
               </a:rPr>
               <a:t>Mục tiêu 'tăng nhận diện thương hiệu' chưa có chỉ số và thời hạn</a:t>
             </a:r>
-            <a:endParaRPr lang="en-US" sz="1800" dirty="0"/>
+            <a:endParaRPr lang="en-US" sz="1600" dirty="0"/>
+          </a:p>
+          <a:p>
+            <a:pPr marL="342900" indent="-342900">
+              <a:spcAft>
+                <a:spcPts val="800"/>
+              </a:spcAft>
+              <a:buSzPct val="100000"/>
+              <a:buChar char="•"/>
+            </a:pPr>
+            <a:r>
+              <a:rPr lang="en-US" sz="1600" dirty="0">
+                <a:solidFill>
+                  <a:srgbClr val="1A2433"/>
+                </a:solidFill>
+              </a:rPr>
+              <a:t>Cần bổ sung trước khi duyệt</a:t>
+            </a:r>
+            <a:endParaRPr lang="en-US" sz="1600" dirty="0"/>
+          </a:p>
+        </p:txBody>
+      </p:sp>
+      <p:sp>
+        <p:nvSpPr>
+          <p:cNvPr id="25" name="Slide Number Placeholder 0"/>
+          <p:cNvSpPr>
+            <a:spLocks noGrp="1"/>
+          </p:cNvSpPr>
+          <p:nvPr>
+            <p:ph type="sldNum" sz="quarter" idx="4294967295"/>
+          </p:nvPr>
+        </p:nvSpPr>
+        <p:spPr>
+          <a:xfrm>
+            <a:off x="8138160" y="4727448"/>
+            <a:ext cx="457200" cy="274320"/>
+          </a:xfrm>
+          <a:prstGeom prst="rect">
+            <a:avLst/>
+          </a:prstGeom>
+          <a:extLst>
+            <a:ext uri="{C572A759-6A51-4108-AA02-DFA0A04FC94B}">
+              <ma14:wrappingTextBoxFlag xmlns:ma14="http://schemas.microsoft.com/office/mac/drawingml/2011/main" val="0"/>
+            </a:ext>
+          </a:extLst>
+        </p:spPr>
+        <p:txBody>
+          <a:bodyPr/>
+          <a:lstStyle>
+            <a:lvl1pPr>
+              <a:defRPr sz="1100">
+                <a:solidFill>
+                  <a:srgbClr val="6B7A90"/>
+                </a:solidFill>
+              </a:defRPr>
+            </a:lvl1pPr>
+          </a:lstStyle>
+          <a:p>
+            <a:pPr algn="r"/>
+            <a:fld id="{F7021451-1387-4CA6-816F-3879F97B5CBC}" type="slidenum">
+              <a:rPr b="0" lang="en-US"/>
+              <a:t>2</a:t>
+            </a:fld>
+            <a:endParaRPr lang="en-US"/>
           </a:p>
         </p:txBody>
       </p:sp>
@@ -2236,8 +2973,8 @@
         </p:nvSpPr>
         <p:spPr>
           <a:xfrm>
-            <a:off x="457200" y="274320"/>
-            <a:ext cx="8229600" cy="868680"/>
+            <a:off x="548640" y="274320"/>
+            <a:ext cx="8046720" cy="868680"/>
           </a:xfrm>
           <a:prstGeom prst="rect">
             <a:avLst/>
@@ -2255,7 +2992,7 @@
             <a:r>
               <a:rPr lang="en-US" sz="2800" b="1" dirty="0">
                 <a:solidFill>
-                  <a:srgbClr val="0F3D3E"/>
+                  <a:srgbClr val="0B2A4A"/>
                 </a:solidFill>
               </a:rPr>
               <a:t>Hai nhóm đối tượng cùng dùng Facebook</a:t>
@@ -2264,574 +3001,341 @@
           </a:p>
         </p:txBody>
       </p:sp>
-      <p:graphicFrame>
-        <p:nvGraphicFramePr>
-          <p:cNvPr id="4" name="bang"/>
-          <p:cNvGraphicFramePr>
-            <a:graphicFrameLocks noGrp="1"/>
-          </p:cNvGraphicFramePr>
+      <p:sp>
+        <p:nvSpPr>
+          <p:cNvPr id="4" name="nhan-xet"/>
+          <p:cNvSpPr/>
+          <p:nvPr/>
+        </p:nvSpPr>
+        <p:spPr>
+          <a:xfrm>
+            <a:off x="548640" y="1463040"/>
+            <a:ext cx="3840480" cy="2194560"/>
+          </a:xfrm>
+          <a:prstGeom prst="roundRect">
+            <a:avLst>
+              <a:gd name="adj" fmla="val 3333"/>
+            </a:avLst>
+          </a:prstGeom>
+          <a:solidFill>
+            <a:srgbClr val="F1F4F8"/>
+          </a:solidFill>
+          <a:ln w="12700">
+            <a:solidFill>
+              <a:srgbClr val="F1F4F8"/>
+            </a:solidFill>
+            <a:prstDash val="solid"/>
+          </a:ln>
+        </p:spPr>
+      </p:sp>
+      <p:pic>
+        <p:nvPicPr>
+          <p:cNvPr id="5" name="bieu-tuong" descr="Biểu tượng">    </p:cNvPr>
+          <p:cNvPicPr>
+            <a:picLocks noChangeAspect="1"/>
+          </p:cNvPicPr>
+          <p:nvPr/>
+        </p:nvPicPr>
+        <p:blipFill>
+          <a:blip r:embed="rId1"/>
+          <a:stretch>
+            <a:fillRect/>
+          </a:stretch>
+        </p:blipFill>
+        <p:spPr>
+          <a:xfrm>
+            <a:off x="731520" y="1664208"/>
+            <a:ext cx="274320" cy="274320"/>
+          </a:xfrm>
+          <a:prstGeom prst="rect">
+            <a:avLst/>
+          </a:prstGeom>
+        </p:spPr>
+      </p:pic>
+      <p:sp>
+        <p:nvSpPr>
+          <p:cNvPr id="6" name="nhan-xet-tieu-de"/>
+          <p:cNvSpPr txBox="1"/>
+          <p:nvPr/>
+        </p:nvSpPr>
+        <p:spPr>
+          <a:xfrm>
+            <a:off x="1097280" y="1645920"/>
+            <a:ext cx="3108960" cy="329184"/>
+          </a:xfrm>
+          <a:prstGeom prst="rect">
+            <a:avLst/>
+          </a:prstGeom>
+          <a:noFill/>
+          <a:ln/>
+        </p:spPr>
+        <p:txBody>
+          <a:bodyPr wrap="square" lIns="0" tIns="0" rIns="0" bIns="0" rtlCol="0" anchor="ctr"/>
+          <a:lstStyle/>
+          <a:p>
+            <a:pPr indent="0" marL="0">
+              <a:buNone/>
+            </a:pPr>
+            <a:r>
+              <a:rPr lang="en-US" sz="1800" b="1" dirty="0">
+                <a:solidFill>
+                  <a:srgbClr val="0B2A4A"/>
+                </a:solidFill>
+              </a:rPr>
+              <a:t>Học sinh lớp 12</a:t>
+            </a:r>
+            <a:endParaRPr lang="en-US" sz="1800" dirty="0"/>
+          </a:p>
+        </p:txBody>
+      </p:sp>
+      <p:sp>
+        <p:nvSpPr>
+          <p:cNvPr id="7" name="nhan-xet-chu"/>
+          <p:cNvSpPr txBox="1"/>
+          <p:nvPr/>
+        </p:nvSpPr>
+        <p:spPr>
+          <a:xfrm>
+            <a:off x="731520" y="2103120"/>
+            <a:ext cx="3474720" cy="1463040"/>
+          </a:xfrm>
+          <a:prstGeom prst="rect">
+            <a:avLst/>
+          </a:prstGeom>
+          <a:noFill/>
+          <a:ln/>
+        </p:spPr>
+        <p:txBody>
+          <a:bodyPr wrap="square" lIns="0" tIns="0" rIns="0" bIns="0" rtlCol="0" anchor="t"/>
+          <a:lstStyle/>
+          <a:p>
+            <a:pPr marL="342900" indent="-342900">
+              <a:spcAft>
+                <a:spcPts val="800"/>
+              </a:spcAft>
+              <a:buSzPct val="100000"/>
+              <a:buChar char="•"/>
+            </a:pPr>
+            <a:r>
+              <a:rPr lang="en-US" sz="1600" dirty="0">
+                <a:solidFill>
+                  <a:srgbClr val="1A2433"/>
+                </a:solidFill>
+              </a:rPr>
+              <a:t>Kênh hay dùng: Facebook, Zalo</a:t>
+            </a:r>
+            <a:endParaRPr lang="en-US" sz="1600" dirty="0"/>
+          </a:p>
+          <a:p>
+            <a:pPr marL="342900" indent="-342900">
+              <a:spcAft>
+                <a:spcPts val="800"/>
+              </a:spcAft>
+              <a:buSzPct val="100000"/>
+              <a:buChar char="•"/>
+            </a:pPr>
+            <a:r>
+              <a:rPr lang="en-US" sz="1600" dirty="0">
+                <a:solidFill>
+                  <a:srgbClr val="1A2433"/>
+                </a:solidFill>
+              </a:rPr>
+              <a:t>Quan tâm: học phí, cơ hội việc làm</a:t>
+            </a:r>
+            <a:endParaRPr lang="en-US" sz="1600" dirty="0"/>
+          </a:p>
+        </p:txBody>
+      </p:sp>
+      <p:sp>
+        <p:nvSpPr>
+          <p:cNvPr id="8" name="nhan-xet"/>
+          <p:cNvSpPr/>
+          <p:nvPr/>
+        </p:nvSpPr>
+        <p:spPr>
+          <a:xfrm>
+            <a:off x="4754880" y="1463040"/>
+            <a:ext cx="3840480" cy="2194560"/>
+          </a:xfrm>
+          <a:prstGeom prst="roundRect">
+            <a:avLst>
+              <a:gd name="adj" fmla="val 3333"/>
+            </a:avLst>
+          </a:prstGeom>
+          <a:solidFill>
+            <a:srgbClr val="F1F4F8"/>
+          </a:solidFill>
+          <a:ln w="12700">
+            <a:solidFill>
+              <a:srgbClr val="F1F4F8"/>
+            </a:solidFill>
+            <a:prstDash val="solid"/>
+          </a:ln>
+        </p:spPr>
+      </p:sp>
+      <p:pic>
+        <p:nvPicPr>
+          <p:cNvPr id="9" name="bieu-tuong" descr="Biểu tượng">    </p:cNvPr>
+          <p:cNvPicPr>
+            <a:picLocks noChangeAspect="1"/>
+          </p:cNvPicPr>
+          <p:nvPr/>
+        </p:nvPicPr>
+        <p:blipFill>
+          <a:blip r:embed="rId2"/>
+          <a:stretch>
+            <a:fillRect/>
+          </a:stretch>
+        </p:blipFill>
+        <p:spPr>
+          <a:xfrm>
+            <a:off x="4937760" y="1664208"/>
+            <a:ext cx="274320" cy="274320"/>
+          </a:xfrm>
+          <a:prstGeom prst="rect">
+            <a:avLst/>
+          </a:prstGeom>
+        </p:spPr>
+      </p:pic>
+      <p:sp>
+        <p:nvSpPr>
+          <p:cNvPr id="10" name="nhan-xet-tieu-de"/>
+          <p:cNvSpPr txBox="1"/>
+          <p:nvPr/>
+        </p:nvSpPr>
+        <p:spPr>
+          <a:xfrm>
+            <a:off x="5303520" y="1645920"/>
+            <a:ext cx="3108960" cy="329184"/>
+          </a:xfrm>
+          <a:prstGeom prst="rect">
+            <a:avLst/>
+          </a:prstGeom>
+          <a:noFill/>
+          <a:ln/>
+        </p:spPr>
+        <p:txBody>
+          <a:bodyPr wrap="square" lIns="0" tIns="0" rIns="0" bIns="0" rtlCol="0" anchor="ctr"/>
+          <a:lstStyle/>
+          <a:p>
+            <a:pPr indent="0" marL="0">
+              <a:buNone/>
+            </a:pPr>
+            <a:r>
+              <a:rPr lang="en-US" sz="1800" b="1" dirty="0">
+                <a:solidFill>
+                  <a:srgbClr val="0B2A4A"/>
+                </a:solidFill>
+              </a:rPr>
+              <a:t>Phụ huynh</a:t>
+            </a:r>
+            <a:endParaRPr lang="en-US" sz="1800" dirty="0"/>
+          </a:p>
+        </p:txBody>
+      </p:sp>
+      <p:sp>
+        <p:nvSpPr>
+          <p:cNvPr id="11" name="nhan-xet-chu"/>
+          <p:cNvSpPr txBox="1"/>
+          <p:nvPr/>
+        </p:nvSpPr>
+        <p:spPr>
+          <a:xfrm>
+            <a:off x="4937760" y="2103120"/>
+            <a:ext cx="3474720" cy="1463040"/>
+          </a:xfrm>
+          <a:prstGeom prst="rect">
+            <a:avLst/>
+          </a:prstGeom>
+          <a:noFill/>
+          <a:ln/>
+        </p:spPr>
+        <p:txBody>
+          <a:bodyPr wrap="square" lIns="0" tIns="0" rIns="0" bIns="0" rtlCol="0" anchor="t"/>
+          <a:lstStyle/>
+          <a:p>
+            <a:pPr marL="342900" indent="-342900">
+              <a:spcAft>
+                <a:spcPts val="800"/>
+              </a:spcAft>
+              <a:buSzPct val="100000"/>
+              <a:buChar char="•"/>
+            </a:pPr>
+            <a:r>
+              <a:rPr lang="en-US" sz="1600" dirty="0">
+                <a:solidFill>
+                  <a:srgbClr val="1A2433"/>
+                </a:solidFill>
+              </a:rPr>
+              <a:t>Kênh hay dùng: Facebook</a:t>
+            </a:r>
+            <a:endParaRPr lang="en-US" sz="1600" dirty="0"/>
+          </a:p>
+          <a:p>
+            <a:pPr marL="342900" indent="-342900">
+              <a:spcAft>
+                <a:spcPts val="800"/>
+              </a:spcAft>
+              <a:buSzPct val="100000"/>
+              <a:buChar char="•"/>
+            </a:pPr>
+            <a:r>
+              <a:rPr lang="en-US" sz="1600" dirty="0">
+                <a:solidFill>
+                  <a:srgbClr val="1A2433"/>
+                </a:solidFill>
+              </a:rPr>
+              <a:t>Quan tâm: học phí, học bổng</a:t>
+            </a:r>
+            <a:endParaRPr lang="en-US" sz="1600" dirty="0"/>
+          </a:p>
+        </p:txBody>
+      </p:sp>
+      <p:sp>
+        <p:nvSpPr>
+          <p:cNvPr id="25" name="Slide Number Placeholder 0"/>
+          <p:cNvSpPr>
+            <a:spLocks noGrp="1"/>
+          </p:cNvSpPr>
           <p:nvPr>
-            <p:extLst>
-              <p:ext uri="{D42A27DB-BD31-4B8C-83A1-F6EECF244321}">
-                <p14:modId xmlns:p14="http://schemas.microsoft.com/office/powerpoint/2010/main" val="1579011935"/>
-              </p:ext>
-            </p:extLst>
+            <p:ph type="sldNum" sz="quarter" idx="4294967295"/>
           </p:nvPr>
-        </p:nvGraphicFramePr>
-        <p:xfrm>
-          <a:off x="457200" y="1463040"/>
-          <a:ext cx="8229600" cy="914400"/>
-        </p:xfrm>
-        <a:graphic>
-          <a:graphicData uri="http://schemas.openxmlformats.org/drawingml/2006/table">
-            <a:tbl>
-              <a:tblPr/>
-              <a:tblGrid>
-                <a:gridCol w="2194560"/>
-                <a:gridCol w="2743200"/>
-                <a:gridCol w="3291840"/>
-              </a:tblGrid>
-              <a:tr h="457200">
-                <a:tc>
-                  <a:txBody>
-                    <a:bodyPr/>
-                    <a:lstStyle/>
-                    <a:p>
-                      <a:pPr indent="0" marL="0">
-                        <a:buNone/>
-                      </a:pPr>
-                      <a:r>
-                        <a:rPr lang="en-US" sz="1400" b="1" dirty="0">
-                          <a:solidFill>
-                            <a:srgbClr val="FFFFFF"/>
-                          </a:solidFill>
-                        </a:rPr>
-                        <a:t>Nhóm</a:t>
-                      </a:r>
-                      <a:endParaRPr lang="en-US" sz="1400" dirty="0"/>
-                    </a:p>
-                  </a:txBody>
-                  <a:tcPr marL="91440" marR="91440" marT="54864" marB="54864" anchor="ctr">
-                    <a:lnL w="9525" cap="flat" cmpd="sng" algn="ctr">
-                      <a:solidFill>
-                        <a:srgbClr val="B8C4C3"/>
-                      </a:solidFill>
-                      <a:prstDash val="solid"/>
-                      <a:round/>
-                      <a:headEnd type="none" w="med" len="med"/>
-                      <a:tailEnd type="none" w="med" len="med"/>
-                    </a:lnL>
-                    <a:lnR w="9525" cap="flat" cmpd="sng" algn="ctr">
-                      <a:solidFill>
-                        <a:srgbClr val="B8C4C3"/>
-                      </a:solidFill>
-                      <a:prstDash val="solid"/>
-                      <a:round/>
-                      <a:headEnd type="none" w="med" len="med"/>
-                      <a:tailEnd type="none" w="med" len="med"/>
-                    </a:lnR>
-                    <a:lnT w="9525" cap="flat" cmpd="sng" algn="ctr">
-                      <a:solidFill>
-                        <a:srgbClr val="B8C4C3"/>
-                      </a:solidFill>
-                      <a:prstDash val="solid"/>
-                      <a:round/>
-                      <a:headEnd type="none" w="med" len="med"/>
-                      <a:tailEnd type="none" w="med" len="med"/>
-                    </a:lnT>
-                    <a:lnB w="9525" cap="flat" cmpd="sng" algn="ctr">
-                      <a:solidFill>
-                        <a:srgbClr val="B8C4C3"/>
-                      </a:solidFill>
-                      <a:prstDash val="solid"/>
-                      <a:round/>
-                      <a:headEnd type="none" w="med" len="med"/>
-                      <a:tailEnd type="none" w="med" len="med"/>
-                    </a:lnB>
-                    <a:solidFill>
-                      <a:srgbClr val="0F3D3E"/>
-                    </a:solidFill>
-                  </a:tcPr>
-                </a:tc>
-                <a:tc>
-                  <a:txBody>
-                    <a:bodyPr/>
-                    <a:lstStyle/>
-                    <a:p>
-                      <a:pPr indent="0" marL="0">
-                        <a:buNone/>
-                      </a:pPr>
-                      <a:r>
-                        <a:rPr lang="en-US" sz="1400" b="1" dirty="0">
-                          <a:solidFill>
-                            <a:srgbClr val="FFFFFF"/>
-                          </a:solidFill>
-                        </a:rPr>
-                        <a:t>Kênh hay dùng</a:t>
-                      </a:r>
-                      <a:endParaRPr lang="en-US" sz="1400" dirty="0"/>
-                    </a:p>
-                  </a:txBody>
-                  <a:tcPr marL="91440" marR="91440" marT="54864" marB="54864" anchor="ctr">
-                    <a:lnL w="9525" cap="flat" cmpd="sng" algn="ctr">
-                      <a:solidFill>
-                        <a:srgbClr val="B8C4C3"/>
-                      </a:solidFill>
-                      <a:prstDash val="solid"/>
-                      <a:round/>
-                      <a:headEnd type="none" w="med" len="med"/>
-                      <a:tailEnd type="none" w="med" len="med"/>
-                    </a:lnL>
-                    <a:lnR w="9525" cap="flat" cmpd="sng" algn="ctr">
-                      <a:solidFill>
-                        <a:srgbClr val="B8C4C3"/>
-                      </a:solidFill>
-                      <a:prstDash val="solid"/>
-                      <a:round/>
-                      <a:headEnd type="none" w="med" len="med"/>
-                      <a:tailEnd type="none" w="med" len="med"/>
-                    </a:lnR>
-                    <a:lnT w="9525" cap="flat" cmpd="sng" algn="ctr">
-                      <a:solidFill>
-                        <a:srgbClr val="B8C4C3"/>
-                      </a:solidFill>
-                      <a:prstDash val="solid"/>
-                      <a:round/>
-                      <a:headEnd type="none" w="med" len="med"/>
-                      <a:tailEnd type="none" w="med" len="med"/>
-                    </a:lnT>
-                    <a:lnB w="9525" cap="flat" cmpd="sng" algn="ctr">
-                      <a:solidFill>
-                        <a:srgbClr val="B8C4C3"/>
-                      </a:solidFill>
-                      <a:prstDash val="solid"/>
-                      <a:round/>
-                      <a:headEnd type="none" w="med" len="med"/>
-                      <a:tailEnd type="none" w="med" len="med"/>
-                    </a:lnB>
-                    <a:solidFill>
-                      <a:srgbClr val="0F3D3E"/>
-                    </a:solidFill>
-                  </a:tcPr>
-                </a:tc>
-                <a:tc>
-                  <a:txBody>
-                    <a:bodyPr/>
-                    <a:lstStyle/>
-                    <a:p>
-                      <a:pPr indent="0" marL="0">
-                        <a:buNone/>
-                      </a:pPr>
-                      <a:r>
-                        <a:rPr lang="en-US" sz="1400" b="1" dirty="0">
-                          <a:solidFill>
-                            <a:srgbClr val="FFFFFF"/>
-                          </a:solidFill>
-                        </a:rPr>
-                        <a:t>Mối quan tâm</a:t>
-                      </a:r>
-                      <a:endParaRPr lang="en-US" sz="1400" dirty="0"/>
-                    </a:p>
-                  </a:txBody>
-                  <a:tcPr marL="91440" marR="91440" marT="54864" marB="54864" anchor="ctr">
-                    <a:lnL w="9525" cap="flat" cmpd="sng" algn="ctr">
-                      <a:solidFill>
-                        <a:srgbClr val="B8C4C3"/>
-                      </a:solidFill>
-                      <a:prstDash val="solid"/>
-                      <a:round/>
-                      <a:headEnd type="none" w="med" len="med"/>
-                      <a:tailEnd type="none" w="med" len="med"/>
-                    </a:lnL>
-                    <a:lnR w="9525" cap="flat" cmpd="sng" algn="ctr">
-                      <a:solidFill>
-                        <a:srgbClr val="B8C4C3"/>
-                      </a:solidFill>
-                      <a:prstDash val="solid"/>
-                      <a:round/>
-                      <a:headEnd type="none" w="med" len="med"/>
-                      <a:tailEnd type="none" w="med" len="med"/>
-                    </a:lnR>
-                    <a:lnT w="9525" cap="flat" cmpd="sng" algn="ctr">
-                      <a:solidFill>
-                        <a:srgbClr val="B8C4C3"/>
-                      </a:solidFill>
-                      <a:prstDash val="solid"/>
-                      <a:round/>
-                      <a:headEnd type="none" w="med" len="med"/>
-                      <a:tailEnd type="none" w="med" len="med"/>
-                    </a:lnT>
-                    <a:lnB w="9525" cap="flat" cmpd="sng" algn="ctr">
-                      <a:solidFill>
-                        <a:srgbClr val="B8C4C3"/>
-                      </a:solidFill>
-                      <a:prstDash val="solid"/>
-                      <a:round/>
-                      <a:headEnd type="none" w="med" len="med"/>
-                      <a:tailEnd type="none" w="med" len="med"/>
-                    </a:lnB>
-                    <a:solidFill>
-                      <a:srgbClr val="0F3D3E"/>
-                    </a:solidFill>
-                  </a:tcPr>
-                </a:tc>
-              </a:tr>
-              <a:tr h="731520">
-                <a:tc>
-                  <a:txBody>
-                    <a:bodyPr/>
-                    <a:lstStyle/>
-                    <a:p>
-                      <a:pPr indent="0" marL="0">
-                        <a:buNone/>
-                      </a:pPr>
-                      <a:r>
-                        <a:rPr lang="en-US" sz="1400" b="1" dirty="0">
-                          <a:solidFill>
-                            <a:srgbClr val="1B1F2A"/>
-                          </a:solidFill>
-                        </a:rPr>
-                        <a:t>Học sinh lớp 12</a:t>
-                      </a:r>
-                      <a:endParaRPr lang="en-US" sz="1400" dirty="0"/>
-                    </a:p>
-                  </a:txBody>
-                  <a:tcPr marL="91440" marR="91440" marT="54864" marB="54864" anchor="ctr">
-                    <a:lnL w="9525" cap="flat" cmpd="sng" algn="ctr">
-                      <a:solidFill>
-                        <a:srgbClr val="B8C4C3"/>
-                      </a:solidFill>
-                      <a:prstDash val="solid"/>
-                      <a:round/>
-                      <a:headEnd type="none" w="med" len="med"/>
-                      <a:tailEnd type="none" w="med" len="med"/>
-                    </a:lnL>
-                    <a:lnR w="9525" cap="flat" cmpd="sng" algn="ctr">
-                      <a:solidFill>
-                        <a:srgbClr val="B8C4C3"/>
-                      </a:solidFill>
-                      <a:prstDash val="solid"/>
-                      <a:round/>
-                      <a:headEnd type="none" w="med" len="med"/>
-                      <a:tailEnd type="none" w="med" len="med"/>
-                    </a:lnR>
-                    <a:lnT w="9525" cap="flat" cmpd="sng" algn="ctr">
-                      <a:solidFill>
-                        <a:srgbClr val="B8C4C3"/>
-                      </a:solidFill>
-                      <a:prstDash val="solid"/>
-                      <a:round/>
-                      <a:headEnd type="none" w="med" len="med"/>
-                      <a:tailEnd type="none" w="med" len="med"/>
-                    </a:lnT>
-                    <a:lnB w="9525" cap="flat" cmpd="sng" algn="ctr">
-                      <a:solidFill>
-                        <a:srgbClr val="B8C4C3"/>
-                      </a:solidFill>
-                      <a:prstDash val="solid"/>
-                      <a:round/>
-                      <a:headEnd type="none" w="med" len="med"/>
-                      <a:tailEnd type="none" w="med" len="med"/>
-                    </a:lnB>
-                  </a:tcPr>
-                </a:tc>
-                <a:tc>
-                  <a:txBody>
-                    <a:bodyPr/>
-                    <a:lstStyle/>
-                    <a:p>
-                      <a:pPr indent="0" marL="0">
-                        <a:buNone/>
-                      </a:pPr>
-                      <a:r>
-                        <a:rPr lang="en-US" sz="1400" dirty="0">
-                          <a:solidFill>
-                            <a:srgbClr val="1B1F2A"/>
-                          </a:solidFill>
-                        </a:rPr>
-                        <a:t>Facebook, Zalo</a:t>
-                      </a:r>
-                      <a:endParaRPr lang="en-US" sz="1400" dirty="0"/>
-                    </a:p>
-                  </a:txBody>
-                  <a:tcPr marL="91440" marR="91440" marT="54864" marB="54864" anchor="ctr">
-                    <a:lnL w="9525" cap="flat" cmpd="sng" algn="ctr">
-                      <a:solidFill>
-                        <a:srgbClr val="B8C4C3"/>
-                      </a:solidFill>
-                      <a:prstDash val="solid"/>
-                      <a:round/>
-                      <a:headEnd type="none" w="med" len="med"/>
-                      <a:tailEnd type="none" w="med" len="med"/>
-                    </a:lnL>
-                    <a:lnR w="9525" cap="flat" cmpd="sng" algn="ctr">
-                      <a:solidFill>
-                        <a:srgbClr val="B8C4C3"/>
-                      </a:solidFill>
-                      <a:prstDash val="solid"/>
-                      <a:round/>
-                      <a:headEnd type="none" w="med" len="med"/>
-                      <a:tailEnd type="none" w="med" len="med"/>
-                    </a:lnR>
-                    <a:lnT w="9525" cap="flat" cmpd="sng" algn="ctr">
-                      <a:solidFill>
-                        <a:srgbClr val="B8C4C3"/>
-                      </a:solidFill>
-                      <a:prstDash val="solid"/>
-                      <a:round/>
-                      <a:headEnd type="none" w="med" len="med"/>
-                      <a:tailEnd type="none" w="med" len="med"/>
-                    </a:lnT>
-                    <a:lnB w="9525" cap="flat" cmpd="sng" algn="ctr">
-                      <a:solidFill>
-                        <a:srgbClr val="B8C4C3"/>
-                      </a:solidFill>
-                      <a:prstDash val="solid"/>
-                      <a:round/>
-                      <a:headEnd type="none" w="med" len="med"/>
-                      <a:tailEnd type="none" w="med" len="med"/>
-                    </a:lnB>
-                  </a:tcPr>
-                </a:tc>
-                <a:tc>
-                  <a:txBody>
-                    <a:bodyPr/>
-                    <a:lstStyle/>
-                    <a:p>
-                      <a:pPr indent="0" marL="0">
-                        <a:buNone/>
-                      </a:pPr>
-                      <a:r>
-                        <a:rPr lang="en-US" sz="1400" dirty="0">
-                          <a:solidFill>
-                            <a:srgbClr val="1B1F2A"/>
-                          </a:solidFill>
-                        </a:rPr>
-                        <a:t>Học phí, cơ hội việc làm</a:t>
-                      </a:r>
-                      <a:endParaRPr lang="en-US" sz="1400" dirty="0"/>
-                    </a:p>
-                  </a:txBody>
-                  <a:tcPr marL="91440" marR="91440" marT="54864" marB="54864" anchor="ctr">
-                    <a:lnL w="9525" cap="flat" cmpd="sng" algn="ctr">
-                      <a:solidFill>
-                        <a:srgbClr val="B8C4C3"/>
-                      </a:solidFill>
-                      <a:prstDash val="solid"/>
-                      <a:round/>
-                      <a:headEnd type="none" w="med" len="med"/>
-                      <a:tailEnd type="none" w="med" len="med"/>
-                    </a:lnL>
-                    <a:lnR w="9525" cap="flat" cmpd="sng" algn="ctr">
-                      <a:solidFill>
-                        <a:srgbClr val="B8C4C3"/>
-                      </a:solidFill>
-                      <a:prstDash val="solid"/>
-                      <a:round/>
-                      <a:headEnd type="none" w="med" len="med"/>
-                      <a:tailEnd type="none" w="med" len="med"/>
-                    </a:lnR>
-                    <a:lnT w="9525" cap="flat" cmpd="sng" algn="ctr">
-                      <a:solidFill>
-                        <a:srgbClr val="B8C4C3"/>
-                      </a:solidFill>
-                      <a:prstDash val="solid"/>
-                      <a:round/>
-                      <a:headEnd type="none" w="med" len="med"/>
-                      <a:tailEnd type="none" w="med" len="med"/>
-                    </a:lnT>
-                    <a:lnB w="9525" cap="flat" cmpd="sng" algn="ctr">
-                      <a:solidFill>
-                        <a:srgbClr val="B8C4C3"/>
-                      </a:solidFill>
-                      <a:prstDash val="solid"/>
-                      <a:round/>
-                      <a:headEnd type="none" w="med" len="med"/>
-                      <a:tailEnd type="none" w="med" len="med"/>
-                    </a:lnB>
-                  </a:tcPr>
-                </a:tc>
-              </a:tr>
-              <a:tr h="731520">
-                <a:tc>
-                  <a:txBody>
-                    <a:bodyPr/>
-                    <a:lstStyle/>
-                    <a:p>
-                      <a:pPr indent="0" marL="0">
-                        <a:buNone/>
-                      </a:pPr>
-                      <a:r>
-                        <a:rPr lang="en-US" sz="1400" b="1" dirty="0">
-                          <a:solidFill>
-                            <a:srgbClr val="1B1F2A"/>
-                          </a:solidFill>
-                        </a:rPr>
-                        <a:t>Phụ huynh</a:t>
-                      </a:r>
-                      <a:endParaRPr lang="en-US" sz="1400" dirty="0"/>
-                    </a:p>
-                  </a:txBody>
-                  <a:tcPr marL="91440" marR="91440" marT="54864" marB="54864" anchor="ctr">
-                    <a:lnL w="9525" cap="flat" cmpd="sng" algn="ctr">
-                      <a:solidFill>
-                        <a:srgbClr val="B8C4C3"/>
-                      </a:solidFill>
-                      <a:prstDash val="solid"/>
-                      <a:round/>
-                      <a:headEnd type="none" w="med" len="med"/>
-                      <a:tailEnd type="none" w="med" len="med"/>
-                    </a:lnL>
-                    <a:lnR w="9525" cap="flat" cmpd="sng" algn="ctr">
-                      <a:solidFill>
-                        <a:srgbClr val="B8C4C3"/>
-                      </a:solidFill>
-                      <a:prstDash val="solid"/>
-                      <a:round/>
-                      <a:headEnd type="none" w="med" len="med"/>
-                      <a:tailEnd type="none" w="med" len="med"/>
-                    </a:lnR>
-                    <a:lnT w="9525" cap="flat" cmpd="sng" algn="ctr">
-                      <a:solidFill>
-                        <a:srgbClr val="B8C4C3"/>
-                      </a:solidFill>
-                      <a:prstDash val="solid"/>
-                      <a:round/>
-                      <a:headEnd type="none" w="med" len="med"/>
-                      <a:tailEnd type="none" w="med" len="med"/>
-                    </a:lnT>
-                    <a:lnB w="9525" cap="flat" cmpd="sng" algn="ctr">
-                      <a:solidFill>
-                        <a:srgbClr val="B8C4C3"/>
-                      </a:solidFill>
-                      <a:prstDash val="solid"/>
-                      <a:round/>
-                      <a:headEnd type="none" w="med" len="med"/>
-                      <a:tailEnd type="none" w="med" len="med"/>
-                    </a:lnB>
-                  </a:tcPr>
-                </a:tc>
-                <a:tc>
-                  <a:txBody>
-                    <a:bodyPr/>
-                    <a:lstStyle/>
-                    <a:p>
-                      <a:pPr indent="0" marL="0">
-                        <a:buNone/>
-                      </a:pPr>
-                      <a:r>
-                        <a:rPr lang="en-US" sz="1400" dirty="0">
-                          <a:solidFill>
-                            <a:srgbClr val="1B1F2A"/>
-                          </a:solidFill>
-                        </a:rPr>
-                        <a:t>Facebook</a:t>
-                      </a:r>
-                      <a:endParaRPr lang="en-US" sz="1400" dirty="0"/>
-                    </a:p>
-                  </a:txBody>
-                  <a:tcPr marL="91440" marR="91440" marT="54864" marB="54864" anchor="ctr">
-                    <a:lnL w="9525" cap="flat" cmpd="sng" algn="ctr">
-                      <a:solidFill>
-                        <a:srgbClr val="B8C4C3"/>
-                      </a:solidFill>
-                      <a:prstDash val="solid"/>
-                      <a:round/>
-                      <a:headEnd type="none" w="med" len="med"/>
-                      <a:tailEnd type="none" w="med" len="med"/>
-                    </a:lnL>
-                    <a:lnR w="9525" cap="flat" cmpd="sng" algn="ctr">
-                      <a:solidFill>
-                        <a:srgbClr val="B8C4C3"/>
-                      </a:solidFill>
-                      <a:prstDash val="solid"/>
-                      <a:round/>
-                      <a:headEnd type="none" w="med" len="med"/>
-                      <a:tailEnd type="none" w="med" len="med"/>
-                    </a:lnR>
-                    <a:lnT w="9525" cap="flat" cmpd="sng" algn="ctr">
-                      <a:solidFill>
-                        <a:srgbClr val="B8C4C3"/>
-                      </a:solidFill>
-                      <a:prstDash val="solid"/>
-                      <a:round/>
-                      <a:headEnd type="none" w="med" len="med"/>
-                      <a:tailEnd type="none" w="med" len="med"/>
-                    </a:lnT>
-                    <a:lnB w="9525" cap="flat" cmpd="sng" algn="ctr">
-                      <a:solidFill>
-                        <a:srgbClr val="B8C4C3"/>
-                      </a:solidFill>
-                      <a:prstDash val="solid"/>
-                      <a:round/>
-                      <a:headEnd type="none" w="med" len="med"/>
-                      <a:tailEnd type="none" w="med" len="med"/>
-                    </a:lnB>
-                  </a:tcPr>
-                </a:tc>
-                <a:tc>
-                  <a:txBody>
-                    <a:bodyPr/>
-                    <a:lstStyle/>
-                    <a:p>
-                      <a:pPr indent="0" marL="0">
-                        <a:buNone/>
-                      </a:pPr>
-                      <a:r>
-                        <a:rPr lang="en-US" sz="1400" dirty="0">
-                          <a:solidFill>
-                            <a:srgbClr val="1B1F2A"/>
-                          </a:solidFill>
-                        </a:rPr>
-                        <a:t>Học phí, học bổng</a:t>
-                      </a:r>
-                      <a:endParaRPr lang="en-US" sz="1400" dirty="0"/>
-                    </a:p>
-                  </a:txBody>
-                  <a:tcPr marL="91440" marR="91440" marT="54864" marB="54864" anchor="ctr">
-                    <a:lnL w="9525" cap="flat" cmpd="sng" algn="ctr">
-                      <a:solidFill>
-                        <a:srgbClr val="B8C4C3"/>
-                      </a:solidFill>
-                      <a:prstDash val="solid"/>
-                      <a:round/>
-                      <a:headEnd type="none" w="med" len="med"/>
-                      <a:tailEnd type="none" w="med" len="med"/>
-                    </a:lnL>
-                    <a:lnR w="9525" cap="flat" cmpd="sng" algn="ctr">
-                      <a:solidFill>
-                        <a:srgbClr val="B8C4C3"/>
-                      </a:solidFill>
-                      <a:prstDash val="solid"/>
-                      <a:round/>
-                      <a:headEnd type="none" w="med" len="med"/>
-                      <a:tailEnd type="none" w="med" len="med"/>
-                    </a:lnR>
-                    <a:lnT w="9525" cap="flat" cmpd="sng" algn="ctr">
-                      <a:solidFill>
-                        <a:srgbClr val="B8C4C3"/>
-                      </a:solidFill>
-                      <a:prstDash val="solid"/>
-                      <a:round/>
-                      <a:headEnd type="none" w="med" len="med"/>
-                      <a:tailEnd type="none" w="med" len="med"/>
-                    </a:lnT>
-                    <a:lnB w="9525" cap="flat" cmpd="sng" algn="ctr">
-                      <a:solidFill>
-                        <a:srgbClr val="B8C4C3"/>
-                      </a:solidFill>
-                      <a:prstDash val="solid"/>
-                      <a:round/>
-                      <a:headEnd type="none" w="med" len="med"/>
-                      <a:tailEnd type="none" w="med" len="med"/>
-                    </a:lnB>
-                  </a:tcPr>
-                </a:tc>
-              </a:tr>
-            </a:tbl>
-          </a:graphicData>
-        </a:graphic>
-      </p:graphicFrame>
+        </p:nvSpPr>
+        <p:spPr>
+          <a:xfrm>
+            <a:off x="8138160" y="4727448"/>
+            <a:ext cx="457200" cy="274320"/>
+          </a:xfrm>
+          <a:prstGeom prst="rect">
+            <a:avLst/>
+          </a:prstGeom>
+          <a:extLst>
+            <a:ext uri="{C572A759-6A51-4108-AA02-DFA0A04FC94B}">
+              <ma14:wrappingTextBoxFlag xmlns:ma14="http://schemas.microsoft.com/office/mac/drawingml/2011/main" val="0"/>
+            </a:ext>
+          </a:extLst>
+        </p:spPr>
+        <p:txBody>
+          <a:bodyPr/>
+          <a:lstStyle>
+            <a:lvl1pPr>
+              <a:defRPr sz="1100">
+                <a:solidFill>
+                  <a:srgbClr val="6B7A90"/>
+                </a:solidFill>
+              </a:defRPr>
+            </a:lvl1pPr>
+          </a:lstStyle>
+          <a:p>
+            <a:pPr algn="r"/>
+            <a:fld id="{F7021451-1387-4CA6-816F-3879F97B5CBC}" type="slidenum">
+              <a:rPr b="0" lang="en-US"/>
+              <a:t>3</a:t>
+            </a:fld>
+            <a:endParaRPr lang="en-US"/>
+          </a:p>
+        </p:txBody>
+      </p:sp>
     </p:spTree>
   </p:cSld>
   <p:clrMapOvr>
@@ -2867,8 +3371,8 @@
         </p:nvSpPr>
         <p:spPr>
           <a:xfrm>
-            <a:off x="457200" y="274320"/>
-            <a:ext cx="8229600" cy="868680"/>
+            <a:off x="548640" y="274320"/>
+            <a:ext cx="8046720" cy="868680"/>
           </a:xfrm>
           <a:prstGeom prst="rect">
             <a:avLst/>
@@ -2886,7 +3390,7 @@
             <a:r>
               <a:rPr lang="en-US" sz="2800" b="1" dirty="0">
                 <a:solidFill>
-                  <a:srgbClr val="0F3D3E"/>
+                  <a:srgbClr val="0B2A4A"/>
                 </a:solidFill>
               </a:rPr>
               <a:t>Thông điệp chính: học thật, ra trường có việc</a:t>
@@ -2897,14 +3401,41 @@
       </p:sp>
       <p:sp>
         <p:nvSpPr>
-          <p:cNvPr id="4" name="noi-dung"/>
+          <p:cNvPr id="4" name="the-chinh"/>
+          <p:cNvSpPr/>
+          <p:nvPr/>
+        </p:nvSpPr>
+        <p:spPr>
+          <a:xfrm>
+            <a:off x="548640" y="1325880"/>
+            <a:ext cx="8046720" cy="1280160"/>
+          </a:xfrm>
+          <a:prstGeom prst="roundRect">
+            <a:avLst>
+              <a:gd name="adj" fmla="val 5714"/>
+            </a:avLst>
+          </a:prstGeom>
+          <a:solidFill>
+            <a:srgbClr val="0B2A4A"/>
+          </a:solidFill>
+          <a:ln w="12700">
+            <a:solidFill>
+              <a:srgbClr val="0B2A4A"/>
+            </a:solidFill>
+            <a:prstDash val="solid"/>
+          </a:ln>
+        </p:spPr>
+      </p:sp>
+      <p:sp>
+        <p:nvSpPr>
+          <p:cNvPr id="5" name="thong-diep-chinh"/>
           <p:cNvSpPr txBox="1"/>
           <p:nvPr/>
         </p:nvSpPr>
         <p:spPr>
           <a:xfrm>
-            <a:off x="457200" y="1371600"/>
-            <a:ext cx="8229600" cy="2743200"/>
+            <a:off x="822960" y="1371600"/>
+            <a:ext cx="7498080" cy="822960"/>
           </a:xfrm>
           <a:prstGeom prst="rect">
             <a:avLst/>
@@ -2913,61 +3444,309 @@
           <a:ln/>
         </p:spPr>
         <p:txBody>
+          <a:bodyPr wrap="square" lIns="0" tIns="0" rIns="0" bIns="0" rtlCol="0" anchor="ctr"/>
+          <a:lstStyle/>
+          <a:p>
+            <a:pPr indent="0" marL="0">
+              <a:buNone/>
+            </a:pPr>
+            <a:r>
+              <a:rPr lang="en-US" sz="3000" b="1" dirty="0">
+                <a:solidFill>
+                  <a:srgbClr val="FFFFFF"/>
+                </a:solidFill>
+                <a:latin typeface="Cambria" pitchFamily="34" charset="0"/>
+                <a:ea typeface="Cambria" pitchFamily="34" charset="-122"/>
+                <a:cs typeface="Cambria" pitchFamily="34" charset="-120"/>
+              </a:rPr>
+              <a:t>Học thật, ra trường có việc</a:t>
+            </a:r>
+            <a:endParaRPr lang="en-US" sz="3000" dirty="0"/>
+          </a:p>
+        </p:txBody>
+      </p:sp>
+      <p:sp>
+        <p:nvSpPr>
+          <p:cNvPr id="6" name="thong-diep-ghi-chu"/>
+          <p:cNvSpPr txBox="1"/>
+          <p:nvPr/>
+        </p:nvSpPr>
+        <p:spPr>
+          <a:xfrm>
+            <a:off x="822960" y="2194560"/>
+            <a:ext cx="7498080" cy="320040"/>
+          </a:xfrm>
+          <a:prstGeom prst="rect">
+            <a:avLst/>
+          </a:prstGeom>
+          <a:noFill/>
+          <a:ln/>
+        </p:spPr>
+        <p:txBody>
+          <a:bodyPr wrap="square" lIns="0" tIns="0" rIns="0" bIns="0" rtlCol="0" anchor="ctr"/>
+          <a:lstStyle/>
+          <a:p>
+            <a:pPr indent="0" marL="0">
+              <a:buNone/>
+            </a:pPr>
+            <a:r>
+              <a:rPr lang="en-US" sz="1400" dirty="0">
+                <a:solidFill>
+                  <a:srgbClr val="D6E2F0"/>
+                </a:solidFill>
+              </a:rPr>
+              <a:t>Thông điệp chính · chưa có số liệu bằng chứng</a:t>
+            </a:r>
+            <a:endParaRPr lang="en-US" sz="1400" dirty="0"/>
+          </a:p>
+        </p:txBody>
+      </p:sp>
+      <p:sp>
+        <p:nvSpPr>
+          <p:cNvPr id="7" name="nhan-xet"/>
+          <p:cNvSpPr/>
+          <p:nvPr/>
+        </p:nvSpPr>
+        <p:spPr>
+          <a:xfrm>
+            <a:off x="548640" y="2788920"/>
+            <a:ext cx="3840480" cy="1508760"/>
+          </a:xfrm>
+          <a:prstGeom prst="roundRect">
+            <a:avLst>
+              <a:gd name="adj" fmla="val 4848"/>
+            </a:avLst>
+          </a:prstGeom>
+          <a:solidFill>
+            <a:srgbClr val="F1F4F8"/>
+          </a:solidFill>
+          <a:ln w="12700">
+            <a:solidFill>
+              <a:srgbClr val="F1F4F8"/>
+            </a:solidFill>
+            <a:prstDash val="solid"/>
+          </a:ln>
+        </p:spPr>
+      </p:sp>
+      <p:sp>
+        <p:nvSpPr>
+          <p:cNvPr id="8" name="nhan-xet-tieu-de"/>
+          <p:cNvSpPr txBox="1"/>
+          <p:nvPr/>
+        </p:nvSpPr>
+        <p:spPr>
+          <a:xfrm>
+            <a:off x="731520" y="2971800"/>
+            <a:ext cx="3474720" cy="329184"/>
+          </a:xfrm>
+          <a:prstGeom prst="rect">
+            <a:avLst/>
+          </a:prstGeom>
+          <a:noFill/>
+          <a:ln/>
+        </p:spPr>
+        <p:txBody>
+          <a:bodyPr wrap="square" lIns="0" tIns="0" rIns="0" bIns="0" rtlCol="0" anchor="ctr"/>
+          <a:lstStyle/>
+          <a:p>
+            <a:pPr indent="0" marL="0">
+              <a:buNone/>
+            </a:pPr>
+            <a:r>
+              <a:rPr lang="en-US" sz="1800" b="1" dirty="0">
+                <a:solidFill>
+                  <a:srgbClr val="0B2A4A"/>
+                </a:solidFill>
+              </a:rPr>
+              <a:t>Phụ: học bổng</a:t>
+            </a:r>
+            <a:endParaRPr lang="en-US" sz="1800" dirty="0"/>
+          </a:p>
+        </p:txBody>
+      </p:sp>
+      <p:sp>
+        <p:nvSpPr>
+          <p:cNvPr id="9" name="nhan-xet-chu"/>
+          <p:cNvSpPr txBox="1"/>
+          <p:nvPr/>
+        </p:nvSpPr>
+        <p:spPr>
+          <a:xfrm>
+            <a:off x="731520" y="3429000"/>
+            <a:ext cx="3474720" cy="777240"/>
+          </a:xfrm>
+          <a:prstGeom prst="rect">
+            <a:avLst/>
+          </a:prstGeom>
+          <a:noFill/>
+          <a:ln/>
+        </p:spPr>
+        <p:txBody>
           <a:bodyPr wrap="square" lIns="0" tIns="0" rIns="0" bIns="0" rtlCol="0" anchor="t"/>
           <a:lstStyle/>
           <a:p>
-            <a:pPr marL="342900" indent="-342900">
+            <a:pPr indent="0" marL="0">
               <a:spcAft>
                 <a:spcPts val="800"/>
               </a:spcAft>
-              <a:buSzPct val="100000"/>
-              <a:buChar char="•"/>
+              <a:buNone/>
             </a:pPr>
             <a:r>
-              <a:rPr lang="en-US" sz="2000" dirty="0">
-                <a:solidFill>
-                  <a:srgbClr val="1B1F2A"/>
+              <a:rPr lang="en-US" sz="1600" dirty="0">
+                <a:solidFill>
+                  <a:srgbClr val="1A2433"/>
                 </a:solidFill>
               </a:rPr>
-              <a:t>Chính: Học thật, ra trường có việc (chưa có số liệu bằng chứng)</a:t>
-            </a:r>
-            <a:endParaRPr lang="en-US" sz="2000" dirty="0"/>
-          </a:p>
-          <a:p>
-            <a:pPr marL="342900" indent="-342900">
+              <a:t>Học bổng cho 100 thí sinh đầu tiên</a:t>
+            </a:r>
+            <a:endParaRPr lang="en-US" sz="1600" dirty="0"/>
+          </a:p>
+        </p:txBody>
+      </p:sp>
+      <p:sp>
+        <p:nvSpPr>
+          <p:cNvPr id="10" name="luu-y"/>
+          <p:cNvSpPr/>
+          <p:nvPr/>
+        </p:nvSpPr>
+        <p:spPr>
+          <a:xfrm>
+            <a:off x="4754880" y="2788920"/>
+            <a:ext cx="3840480" cy="1508760"/>
+          </a:xfrm>
+          <a:prstGeom prst="roundRect">
+            <a:avLst>
+              <a:gd name="adj" fmla="val 4848"/>
+            </a:avLst>
+          </a:prstGeom>
+          <a:solidFill>
+            <a:srgbClr val="FBF1E1"/>
+          </a:solidFill>
+          <a:ln w="12700">
+            <a:solidFill>
+              <a:srgbClr val="B8902B"/>
+            </a:solidFill>
+            <a:prstDash val="solid"/>
+          </a:ln>
+        </p:spPr>
+      </p:sp>
+      <p:sp>
+        <p:nvSpPr>
+          <p:cNvPr id="11" name="nhan-xet-tieu-de"/>
+          <p:cNvSpPr txBox="1"/>
+          <p:nvPr/>
+        </p:nvSpPr>
+        <p:spPr>
+          <a:xfrm>
+            <a:off x="4937760" y="2971800"/>
+            <a:ext cx="3474720" cy="329184"/>
+          </a:xfrm>
+          <a:prstGeom prst="rect">
+            <a:avLst/>
+          </a:prstGeom>
+          <a:noFill/>
+          <a:ln/>
+        </p:spPr>
+        <p:txBody>
+          <a:bodyPr wrap="square" lIns="0" tIns="0" rIns="0" bIns="0" rtlCol="0" anchor="ctr"/>
+          <a:lstStyle/>
+          <a:p>
+            <a:pPr indent="0" marL="0">
+              <a:buNone/>
+            </a:pPr>
+            <a:r>
+              <a:rPr lang="en-US" sz="1800" b="1" dirty="0">
+                <a:solidFill>
+                  <a:srgbClr val="A23B3B"/>
+                </a:solidFill>
+              </a:rPr>
+              <a:t>Phụ: thực tập</a:t>
+            </a:r>
+            <a:endParaRPr lang="en-US" sz="1800" dirty="0"/>
+          </a:p>
+        </p:txBody>
+      </p:sp>
+      <p:sp>
+        <p:nvSpPr>
+          <p:cNvPr id="12" name="nhan-xet-chu"/>
+          <p:cNvSpPr txBox="1"/>
+          <p:nvPr/>
+        </p:nvSpPr>
+        <p:spPr>
+          <a:xfrm>
+            <a:off x="4937760" y="3429000"/>
+            <a:ext cx="3474720" cy="777240"/>
+          </a:xfrm>
+          <a:prstGeom prst="rect">
+            <a:avLst/>
+          </a:prstGeom>
+          <a:noFill/>
+          <a:ln/>
+        </p:spPr>
+        <p:txBody>
+          <a:bodyPr wrap="square" lIns="0" tIns="0" rIns="0" bIns="0" rtlCol="0" anchor="t"/>
+          <a:lstStyle/>
+          <a:p>
+            <a:pPr indent="0" marL="0">
               <a:spcAft>
                 <a:spcPts val="800"/>
               </a:spcAft>
-              <a:buSzPct val="100000"/>
-              <a:buChar char="•"/>
+              <a:buNone/>
             </a:pPr>
             <a:r>
-              <a:rPr lang="en-US" sz="2000" dirty="0">
-                <a:solidFill>
-                  <a:srgbClr val="1B1F2A"/>
+              <a:rPr lang="en-US" sz="1600" dirty="0">
+                <a:solidFill>
+                  <a:srgbClr val="1A2433"/>
                 </a:solidFill>
               </a:rPr>
-              <a:t>Phụ: Học bổng cho 100 thí sinh đầu tiên</a:t>
-            </a:r>
-            <a:endParaRPr lang="en-US" sz="2000" dirty="0"/>
-          </a:p>
-          <a:p>
-            <a:pPr marL="342900" indent="-342900">
-              <a:spcAft>
-                <a:spcPts val="800"/>
-              </a:spcAft>
-              <a:buSzPct val="100000"/>
-              <a:buChar char="•"/>
-            </a:pPr>
-            <a:r>
-              <a:rPr lang="en-US" sz="2000" dirty="0">
-                <a:solidFill>
-                  <a:srgbClr val="1B1F2A"/>
-                </a:solidFill>
-              </a:rPr>
-              <a:t>Phụ: Thực tập tại doanh nghiệp (chưa có số liệu bằng chứng)</a:t>
-            </a:r>
-            <a:endParaRPr lang="en-US" sz="2000" dirty="0"/>
+              <a:t>Chưa có số liệu bằng chứng</a:t>
+            </a:r>
+            <a:endParaRPr lang="en-US" sz="1600" dirty="0"/>
+          </a:p>
+        </p:txBody>
+      </p:sp>
+      <p:sp>
+        <p:nvSpPr>
+          <p:cNvPr id="25" name="Slide Number Placeholder 0"/>
+          <p:cNvSpPr>
+            <a:spLocks noGrp="1"/>
+          </p:cNvSpPr>
+          <p:nvPr>
+            <p:ph type="sldNum" sz="quarter" idx="4294967295"/>
+          </p:nvPr>
+        </p:nvSpPr>
+        <p:spPr>
+          <a:xfrm>
+            <a:off x="8138160" y="4727448"/>
+            <a:ext cx="457200" cy="274320"/>
+          </a:xfrm>
+          <a:prstGeom prst="rect">
+            <a:avLst/>
+          </a:prstGeom>
+          <a:extLst>
+            <a:ext uri="{C572A759-6A51-4108-AA02-DFA0A04FC94B}">
+              <ma14:wrappingTextBoxFlag xmlns:ma14="http://schemas.microsoft.com/office/mac/drawingml/2011/main" val="0"/>
+            </a:ext>
+          </a:extLst>
+        </p:spPr>
+        <p:txBody>
+          <a:bodyPr/>
+          <a:lstStyle>
+            <a:lvl1pPr>
+              <a:defRPr sz="1100">
+                <a:solidFill>
+                  <a:srgbClr val="6B7A90"/>
+                </a:solidFill>
+              </a:defRPr>
+            </a:lvl1pPr>
+          </a:lstStyle>
+          <a:p>
+            <a:pPr algn="r"/>
+            <a:fld id="{F7021451-1387-4CA6-816F-3879F97B5CBC}" type="slidenum">
+              <a:rPr b="0" lang="en-US"/>
+              <a:t>4</a:t>
+            </a:fld>
+            <a:endParaRPr lang="en-US"/>
           </a:p>
         </p:txBody>
       </p:sp>
@@ -3006,8 +3785,8 @@
         </p:nvSpPr>
         <p:spPr>
           <a:xfrm>
-            <a:off x="457200" y="274320"/>
-            <a:ext cx="8229600" cy="868680"/>
+            <a:off x="548640" y="274320"/>
+            <a:ext cx="8046720" cy="868680"/>
           </a:xfrm>
           <a:prstGeom prst="rect">
             <a:avLst/>
@@ -3025,7 +3804,7 @@
             <a:r>
               <a:rPr lang="en-US" sz="2800" b="1" dirty="0">
                 <a:solidFill>
-                  <a:srgbClr val="0F3D3E"/>
+                  <a:srgbClr val="0B2A4A"/>
                 </a:solidFill>
               </a:rPr>
               <a:t>Facebook Ads chiếm phần lớn ngân sách</a:t>
@@ -3041,8 +3820,8 @@
           <p:nvPr/>
         </p:nvGraphicFramePr>
         <p:xfrm>
-          <a:off x="457200" y="1234440"/>
-          <a:ext cx="5486400" cy="3291840"/>
+          <a:off x="548640" y="1234440"/>
+          <a:ext cx="5394960" cy="3154680"/>
         </p:xfrm>
         <a:graphic xmlns:a="http://schemas.openxmlformats.org/drawingml/2006/main">
           <a:graphicData uri="http://schemas.openxmlformats.org/drawingml/2006/chart">
@@ -3058,35 +3837,59 @@
         </p:nvSpPr>
         <p:spPr>
           <a:xfrm>
-            <a:off x="6217920" y="1737360"/>
-            <a:ext cx="2468880" cy="1920240"/>
+            <a:off x="6172200" y="1325880"/>
+            <a:ext cx="2423160" cy="3017520"/>
           </a:xfrm>
           <a:prstGeom prst="roundRect">
             <a:avLst>
-              <a:gd name="adj" fmla="val 4762"/>
+              <a:gd name="adj" fmla="val 3019"/>
             </a:avLst>
           </a:prstGeom>
           <a:solidFill>
-            <a:srgbClr val="FBEEDD"/>
+            <a:srgbClr val="FBF1E1"/>
           </a:solidFill>
           <a:ln w="12700">
             <a:solidFill>
-              <a:srgbClr val="D9822B"/>
+              <a:srgbClr val="B8902B"/>
             </a:solidFill>
             <a:prstDash val="solid"/>
           </a:ln>
         </p:spPr>
       </p:sp>
-      <p:sp>
-        <p:nvSpPr>
-          <p:cNvPr id="6" name="luu-y-chu"/>
+      <p:pic>
+        <p:nvPicPr>
+          <p:cNvPr id="6" name="bieu-tuong" descr="Biểu tượng">    </p:cNvPr>
+          <p:cNvPicPr>
+            <a:picLocks noChangeAspect="1"/>
+          </p:cNvPicPr>
+          <p:nvPr/>
+        </p:nvPicPr>
+        <p:blipFill>
+          <a:blip r:embed="rId2"/>
+          <a:stretch>
+            <a:fillRect/>
+          </a:stretch>
+        </p:blipFill>
+        <p:spPr>
+          <a:xfrm>
+            <a:off x="6355080" y="1527048"/>
+            <a:ext cx="274320" cy="274320"/>
+          </a:xfrm>
+          <a:prstGeom prst="rect">
+            <a:avLst/>
+          </a:prstGeom>
+        </p:spPr>
+      </p:pic>
+      <p:sp>
+        <p:nvSpPr>
+          <p:cNvPr id="7" name="nhan-xet-tieu-de"/>
           <p:cNvSpPr txBox="1"/>
           <p:nvPr/>
         </p:nvSpPr>
         <p:spPr>
           <a:xfrm>
-            <a:off x="6355080" y="1828800"/>
-            <a:ext cx="2194560" cy="1737360"/>
+            <a:off x="6720840" y="1508760"/>
+            <a:ext cx="1691640" cy="329184"/>
           </a:xfrm>
           <a:prstGeom prst="rect">
             <a:avLst/>
@@ -3095,71 +3898,178 @@
           <a:ln/>
         </p:spPr>
         <p:txBody>
-          <a:bodyPr wrap="square" lIns="0" tIns="0" rIns="0" bIns="0" rtlCol="0" anchor="t"/>
+          <a:bodyPr wrap="square" lIns="0" tIns="0" rIns="0" bIns="0" rtlCol="0" anchor="ctr"/>
           <a:lstStyle/>
           <a:p>
             <a:pPr indent="0" marL="0">
               <a:buNone/>
             </a:pPr>
             <a:r>
-              <a:rPr lang="en-US" sz="1600" b="1" dirty="0">
-                <a:solidFill>
-                  <a:srgbClr val="1B1F2A"/>
+              <a:rPr lang="en-US" sz="1800" b="1" dirty="0">
+                <a:solidFill>
+                  <a:srgbClr val="A23B3B"/>
                 </a:solidFill>
               </a:rPr>
               <a:t>Cần rà lại</a:t>
             </a:r>
+            <a:endParaRPr lang="en-US" sz="1800" dirty="0"/>
+          </a:p>
+        </p:txBody>
+      </p:sp>
+      <p:sp>
+        <p:nvSpPr>
+          <p:cNvPr id="8" name="nhan-xet-chu"/>
+          <p:cNvSpPr txBox="1"/>
+          <p:nvPr/>
+        </p:nvSpPr>
+        <p:spPr>
+          <a:xfrm>
+            <a:off x="6355080" y="1965960"/>
+            <a:ext cx="2057400" cy="2286000"/>
+          </a:xfrm>
+          <a:prstGeom prst="rect">
+            <a:avLst/>
+          </a:prstGeom>
+          <a:noFill/>
+          <a:ln/>
+        </p:spPr>
+        <p:txBody>
+          <a:bodyPr wrap="square" lIns="0" tIns="0" rIns="0" bIns="0" rtlCol="0" anchor="t"/>
+          <a:lstStyle/>
+          <a:p>
+            <a:pPr marL="342900" indent="-342900">
+              <a:spcAft>
+                <a:spcPts val="800"/>
+              </a:spcAft>
+              <a:buSzPct val="100000"/>
+              <a:buChar char="•"/>
+            </a:pPr>
+            <a:r>
+              <a:rPr lang="en-US" sz="1600" dirty="0">
+                <a:solidFill>
+                  <a:srgbClr val="1A2433"/>
+                </a:solidFill>
+              </a:rPr>
+              <a:t>Cộng bốn kênh: 520</a:t>
+            </a:r>
             <a:endParaRPr lang="en-US" sz="1600" dirty="0"/>
           </a:p>
+          <a:p>
+            <a:pPr marL="342900" indent="-342900">
+              <a:spcAft>
+                <a:spcPts val="800"/>
+              </a:spcAft>
+              <a:buSzPct val="100000"/>
+              <a:buChar char="•"/>
+            </a:pPr>
+            <a:r>
+              <a:rPr lang="en-US" sz="1600" dirty="0">
+                <a:solidFill>
+                  <a:srgbClr val="1A2433"/>
+                </a:solidFill>
+              </a:rPr>
+              <a:t>Khai tổng: 500</a:t>
+            </a:r>
+            <a:endParaRPr lang="en-US" sz="1600" dirty="0"/>
+          </a:p>
+          <a:p>
+            <a:pPr marL="342900" indent="-342900">
+              <a:spcAft>
+                <a:spcPts val="800"/>
+              </a:spcAft>
+              <a:buSzPct val="100000"/>
+              <a:buChar char="•"/>
+            </a:pPr>
+            <a:r>
+              <a:rPr lang="en-US" sz="1600" dirty="0">
+                <a:solidFill>
+                  <a:srgbClr val="1A2433"/>
+                </a:solidFill>
+              </a:rPr>
+              <a:t>Lệch 20 triệu đồng chưa giải thích</a:t>
+            </a:r>
+            <a:endParaRPr lang="en-US" sz="1600" dirty="0"/>
+          </a:p>
+        </p:txBody>
+      </p:sp>
+      <p:sp>
+        <p:nvSpPr>
+          <p:cNvPr id="9" name="nguon"/>
+          <p:cNvSpPr txBox="1"/>
+          <p:nvPr/>
+        </p:nvSpPr>
+        <p:spPr>
+          <a:xfrm>
+            <a:off x="548640" y="4416552"/>
+            <a:ext cx="8046720" cy="274320"/>
+          </a:xfrm>
+          <a:prstGeom prst="rect">
+            <a:avLst/>
+          </a:prstGeom>
+          <a:noFill/>
+          <a:ln/>
+        </p:spPr>
+        <p:txBody>
+          <a:bodyPr wrap="square" lIns="0" tIns="0" rIns="0" bIns="0" rtlCol="0" anchor="ctr"/>
+          <a:lstStyle/>
           <a:p>
             <a:pPr indent="0" marL="0">
               <a:buNone/>
             </a:pPr>
             <a:r>
-              <a:rPr lang="en-US" sz="1400" dirty="0">
-                <a:solidFill>
-                  <a:srgbClr val="1B1F2A"/>
-                </a:solidFill>
-              </a:rPr>
-              <a:t>Cộng kênh: 520. Khai tổng: 500.</a:t>
-            </a:r>
-            <a:endParaRPr lang="en-US" sz="1600" dirty="0"/>
-          </a:p>
-        </p:txBody>
-      </p:sp>
-      <p:sp>
-        <p:nvSpPr>
-          <p:cNvPr id="7" name="nguon"/>
-          <p:cNvSpPr txBox="1"/>
-          <p:nvPr/>
-        </p:nvSpPr>
-        <p:spPr>
-          <a:xfrm>
-            <a:off x="457200" y="4617720"/>
-            <a:ext cx="8229600" cy="320040"/>
-          </a:xfrm>
-          <a:prstGeom prst="rect">
-            <a:avLst/>
-          </a:prstGeom>
-          <a:noFill/>
-          <a:ln/>
-        </p:spPr>
-        <p:txBody>
-          <a:bodyPr wrap="square" lIns="0" tIns="0" rIns="0" bIns="0" rtlCol="0" anchor="ctr"/>
-          <a:lstStyle/>
-          <a:p>
-            <a:pPr indent="0" marL="0">
-              <a:buNone/>
-            </a:pPr>
-            <a:r>
               <a:rPr lang="en-US" sz="1100" i="1" dirty="0">
                 <a:solidFill>
-                  <a:srgbClr val="5A6666"/>
+                  <a:srgbClr val="6B7A90"/>
                 </a:solidFill>
               </a:rPr>
               <a:t>Nguồn: dự kiến ngân sách theo kênh của đơn vị (đơn vị: triệu đồng)</a:t>
             </a:r>
             <a:endParaRPr lang="en-US" sz="1100" dirty="0"/>
+          </a:p>
+        </p:txBody>
+      </p:sp>
+      <p:sp>
+        <p:nvSpPr>
+          <p:cNvPr id="25" name="Slide Number Placeholder 0"/>
+          <p:cNvSpPr>
+            <a:spLocks noGrp="1"/>
+          </p:cNvSpPr>
+          <p:nvPr>
+            <p:ph type="sldNum" sz="quarter" idx="4294967295"/>
+          </p:nvPr>
+        </p:nvSpPr>
+        <p:spPr>
+          <a:xfrm>
+            <a:off x="8138160" y="4727448"/>
+            <a:ext cx="457200" cy="274320"/>
+          </a:xfrm>
+          <a:prstGeom prst="rect">
+            <a:avLst/>
+          </a:prstGeom>
+          <a:extLst>
+            <a:ext uri="{C572A759-6A51-4108-AA02-DFA0A04FC94B}">
+              <ma14:wrappingTextBoxFlag xmlns:ma14="http://schemas.microsoft.com/office/mac/drawingml/2011/main" val="0"/>
+            </a:ext>
+          </a:extLst>
+        </p:spPr>
+        <p:txBody>
+          <a:bodyPr/>
+          <a:lstStyle>
+            <a:lvl1pPr>
+              <a:defRPr sz="1100">
+                <a:solidFill>
+                  <a:srgbClr val="6B7A90"/>
+                </a:solidFill>
+              </a:defRPr>
+            </a:lvl1pPr>
+          </a:lstStyle>
+          <a:p>
+            <a:pPr algn="r"/>
+            <a:fld id="{F7021451-1387-4CA6-816F-3879F97B5CBC}" type="slidenum">
+              <a:rPr b="0" lang="en-US"/>
+              <a:t>5</a:t>
+            </a:fld>
+            <a:endParaRPr lang="en-US"/>
           </a:p>
         </p:txBody>
       </p:sp>
@@ -3198,8 +4108,8 @@
         </p:nvSpPr>
         <p:spPr>
           <a:xfrm>
-            <a:off x="457200" y="274320"/>
-            <a:ext cx="8229600" cy="868680"/>
+            <a:off x="548640" y="274320"/>
+            <a:ext cx="8046720" cy="868680"/>
           </a:xfrm>
           <a:prstGeom prst="rect">
             <a:avLst/>
@@ -3217,7 +4127,7 @@
             <a:r>
               <a:rPr lang="en-US" sz="2800" b="1" dirty="0">
                 <a:solidFill>
-                  <a:srgbClr val="0F3D3E"/>
+                  <a:srgbClr val="0B2A4A"/>
                 </a:solidFill>
               </a:rPr>
               <a:t>Bốn pha: chuẩn bị, chạy, cao điểm, tổng kết</a:t>
@@ -3234,14 +4144,14 @@
         </p:nvSpPr>
         <p:spPr>
           <a:xfrm>
-            <a:off x="457200" y="1645920"/>
-            <a:ext cx="2011680" cy="914400"/>
+            <a:off x="548640" y="1554480"/>
+            <a:ext cx="1965960" cy="914400"/>
           </a:xfrm>
           <a:prstGeom prst="rect">
             <a:avLst/>
           </a:prstGeom>
           <a:solidFill>
-            <a:srgbClr val="5B8DB8"/>
+            <a:srgbClr val="1F4E8C"/>
           </a:solidFill>
           <a:ln w="12700">
             <a:solidFill>
@@ -3259,8 +4169,8 @@
         </p:nvSpPr>
         <p:spPr>
           <a:xfrm>
-            <a:off x="457200" y="1645920"/>
-            <a:ext cx="2011680" cy="914400"/>
+            <a:off x="548640" y="1554480"/>
+            <a:ext cx="1965960" cy="914400"/>
           </a:xfrm>
           <a:prstGeom prst="rect">
             <a:avLst/>
@@ -3295,8 +4205,8 @@
         </p:nvSpPr>
         <p:spPr>
           <a:xfrm>
-            <a:off x="457200" y="2697480"/>
-            <a:ext cx="2011680" cy="548640"/>
+            <a:off x="548640" y="2606040"/>
+            <a:ext cx="1965960" cy="365760"/>
           </a:xfrm>
           <a:prstGeom prst="rect">
             <a:avLst/>
@@ -3314,7 +4224,7 @@
             <a:r>
               <a:rPr lang="en-US" sz="1400" dirty="0">
                 <a:solidFill>
-                  <a:srgbClr val="4A5656"/>
+                  <a:srgbClr val="6B7A90"/>
                 </a:solidFill>
               </a:rPr>
               <a:t>Mốc: ........</a:t>
@@ -3325,20 +4235,56 @@
       </p:sp>
       <p:sp>
         <p:nvSpPr>
-          <p:cNvPr id="7" name="pha"/>
+          <p:cNvPr id="7" name="phu-trach"/>
+          <p:cNvSpPr txBox="1"/>
+          <p:nvPr/>
+        </p:nvSpPr>
+        <p:spPr>
+          <a:xfrm>
+            <a:off x="548640" y="2971800"/>
+            <a:ext cx="1965960" cy="365760"/>
+          </a:xfrm>
+          <a:prstGeom prst="rect">
+            <a:avLst/>
+          </a:prstGeom>
+          <a:noFill/>
+          <a:ln/>
+        </p:spPr>
+        <p:txBody>
+          <a:bodyPr wrap="square" lIns="0" tIns="0" rIns="0" bIns="0" rtlCol="0" anchor="ctr"/>
+          <a:lstStyle/>
+          <a:p>
+            <a:pPr algn="ctr" indent="0" marL="0">
+              <a:buNone/>
+            </a:pPr>
+            <a:r>
+              <a:rPr lang="en-US" sz="1400" dirty="0">
+                <a:solidFill>
+                  <a:srgbClr val="6B7A90"/>
+                </a:solidFill>
+              </a:rPr>
+              <a:t>Phụ trách: ........</a:t>
+            </a:r>
+            <a:endParaRPr lang="en-US" sz="1400" dirty="0"/>
+          </a:p>
+        </p:txBody>
+      </p:sp>
+      <p:sp>
+        <p:nvSpPr>
+          <p:cNvPr id="8" name="pha"/>
           <p:cNvSpPr/>
           <p:nvPr/>
         </p:nvSpPr>
         <p:spPr>
           <a:xfrm>
-            <a:off x="2542032" y="1645920"/>
-            <a:ext cx="2011680" cy="914400"/>
+            <a:off x="2606040" y="1554480"/>
+            <a:ext cx="1965960" cy="914400"/>
           </a:xfrm>
           <a:prstGeom prst="rect">
             <a:avLst/>
           </a:prstGeom>
           <a:solidFill>
-            <a:srgbClr val="0F6E6E"/>
+            <a:srgbClr val="2E7D6B"/>
           </a:solidFill>
           <a:ln w="12700">
             <a:solidFill>
@@ -3350,14 +4296,14 @@
       </p:sp>
       <p:sp>
         <p:nvSpPr>
-          <p:cNvPr id="8" name="pha-chu"/>
+          <p:cNvPr id="9" name="pha-chu"/>
           <p:cNvSpPr txBox="1"/>
           <p:nvPr/>
         </p:nvSpPr>
         <p:spPr>
           <a:xfrm>
-            <a:off x="2542032" y="1645920"/>
-            <a:ext cx="2011680" cy="914400"/>
+            <a:off x="2606040" y="1554480"/>
+            <a:ext cx="1965960" cy="914400"/>
           </a:xfrm>
           <a:prstGeom prst="rect">
             <a:avLst/>
@@ -3386,14 +4332,14 @@
       </p:sp>
       <p:sp>
         <p:nvSpPr>
-          <p:cNvPr id="9" name="moc"/>
+          <p:cNvPr id="10" name="moc"/>
           <p:cNvSpPr txBox="1"/>
           <p:nvPr/>
         </p:nvSpPr>
         <p:spPr>
           <a:xfrm>
-            <a:off x="2542032" y="2697480"/>
-            <a:ext cx="2011680" cy="548640"/>
+            <a:off x="2606040" y="2606040"/>
+            <a:ext cx="1965960" cy="365760"/>
           </a:xfrm>
           <a:prstGeom prst="rect">
             <a:avLst/>
@@ -3411,7 +4357,7 @@
             <a:r>
               <a:rPr lang="en-US" sz="1400" dirty="0">
                 <a:solidFill>
-                  <a:srgbClr val="4A5656"/>
+                  <a:srgbClr val="6B7A90"/>
                 </a:solidFill>
               </a:rPr>
               <a:t>Mốc: ........</a:t>
@@ -3422,20 +4368,56 @@
       </p:sp>
       <p:sp>
         <p:nvSpPr>
-          <p:cNvPr id="10" name="pha"/>
+          <p:cNvPr id="11" name="phu-trach"/>
+          <p:cNvSpPr txBox="1"/>
+          <p:nvPr/>
+        </p:nvSpPr>
+        <p:spPr>
+          <a:xfrm>
+            <a:off x="2606040" y="2971800"/>
+            <a:ext cx="1965960" cy="365760"/>
+          </a:xfrm>
+          <a:prstGeom prst="rect">
+            <a:avLst/>
+          </a:prstGeom>
+          <a:noFill/>
+          <a:ln/>
+        </p:spPr>
+        <p:txBody>
+          <a:bodyPr wrap="square" lIns="0" tIns="0" rIns="0" bIns="0" rtlCol="0" anchor="ctr"/>
+          <a:lstStyle/>
+          <a:p>
+            <a:pPr algn="ctr" indent="0" marL="0">
+              <a:buNone/>
+            </a:pPr>
+            <a:r>
+              <a:rPr lang="en-US" sz="1400" dirty="0">
+                <a:solidFill>
+                  <a:srgbClr val="6B7A90"/>
+                </a:solidFill>
+              </a:rPr>
+              <a:t>Phụ trách: ........</a:t>
+            </a:r>
+            <a:endParaRPr lang="en-US" sz="1400" dirty="0"/>
+          </a:p>
+        </p:txBody>
+      </p:sp>
+      <p:sp>
+        <p:nvSpPr>
+          <p:cNvPr id="12" name="pha"/>
           <p:cNvSpPr/>
           <p:nvPr/>
         </p:nvSpPr>
         <p:spPr>
           <a:xfrm>
-            <a:off x="4626864" y="1645920"/>
-            <a:ext cx="2011680" cy="914400"/>
+            <a:off x="4663440" y="1554480"/>
+            <a:ext cx="1965960" cy="914400"/>
           </a:xfrm>
           <a:prstGeom prst="rect">
             <a:avLst/>
           </a:prstGeom>
           <a:solidFill>
-            <a:srgbClr val="D9822B"/>
+            <a:srgbClr val="B8902B"/>
           </a:solidFill>
           <a:ln w="12700">
             <a:solidFill>
@@ -3447,14 +4429,14 @@
       </p:sp>
       <p:sp>
         <p:nvSpPr>
-          <p:cNvPr id="11" name="pha-chu"/>
+          <p:cNvPr id="13" name="pha-chu"/>
           <p:cNvSpPr txBox="1"/>
           <p:nvPr/>
         </p:nvSpPr>
         <p:spPr>
           <a:xfrm>
-            <a:off x="4626864" y="1645920"/>
-            <a:ext cx="2011680" cy="914400"/>
+            <a:off x="4663440" y="1554480"/>
+            <a:ext cx="1965960" cy="914400"/>
           </a:xfrm>
           <a:prstGeom prst="rect">
             <a:avLst/>
@@ -3483,14 +4465,14 @@
       </p:sp>
       <p:sp>
         <p:nvSpPr>
-          <p:cNvPr id="12" name="moc"/>
+          <p:cNvPr id="14" name="moc"/>
           <p:cNvSpPr txBox="1"/>
           <p:nvPr/>
         </p:nvSpPr>
         <p:spPr>
           <a:xfrm>
-            <a:off x="4626864" y="2697480"/>
-            <a:ext cx="2011680" cy="548640"/>
+            <a:off x="4663440" y="2606040"/>
+            <a:ext cx="1965960" cy="365760"/>
           </a:xfrm>
           <a:prstGeom prst="rect">
             <a:avLst/>
@@ -3508,7 +4490,7 @@
             <a:r>
               <a:rPr lang="en-US" sz="1400" dirty="0">
                 <a:solidFill>
-                  <a:srgbClr val="4A5656"/>
+                  <a:srgbClr val="6B7A90"/>
                 </a:solidFill>
               </a:rPr>
               <a:t>Mốc: ........</a:t>
@@ -3519,20 +4501,56 @@
       </p:sp>
       <p:sp>
         <p:nvSpPr>
-          <p:cNvPr id="13" name="pha"/>
+          <p:cNvPr id="15" name="phu-trach"/>
+          <p:cNvSpPr txBox="1"/>
+          <p:nvPr/>
+        </p:nvSpPr>
+        <p:spPr>
+          <a:xfrm>
+            <a:off x="4663440" y="2971800"/>
+            <a:ext cx="1965960" cy="365760"/>
+          </a:xfrm>
+          <a:prstGeom prst="rect">
+            <a:avLst/>
+          </a:prstGeom>
+          <a:noFill/>
+          <a:ln/>
+        </p:spPr>
+        <p:txBody>
+          <a:bodyPr wrap="square" lIns="0" tIns="0" rIns="0" bIns="0" rtlCol="0" anchor="ctr"/>
+          <a:lstStyle/>
+          <a:p>
+            <a:pPr algn="ctr" indent="0" marL="0">
+              <a:buNone/>
+            </a:pPr>
+            <a:r>
+              <a:rPr lang="en-US" sz="1400" dirty="0">
+                <a:solidFill>
+                  <a:srgbClr val="6B7A90"/>
+                </a:solidFill>
+              </a:rPr>
+              <a:t>Phụ trách: ........</a:t>
+            </a:r>
+            <a:endParaRPr lang="en-US" sz="1400" dirty="0"/>
+          </a:p>
+        </p:txBody>
+      </p:sp>
+      <p:sp>
+        <p:nvSpPr>
+          <p:cNvPr id="16" name="pha"/>
           <p:cNvSpPr/>
           <p:nvPr/>
         </p:nvSpPr>
         <p:spPr>
           <a:xfrm>
-            <a:off x="6711696" y="1645920"/>
-            <a:ext cx="2011680" cy="914400"/>
+            <a:off x="6720840" y="1554480"/>
+            <a:ext cx="1965960" cy="914400"/>
           </a:xfrm>
           <a:prstGeom prst="rect">
             <a:avLst/>
           </a:prstGeom>
           <a:solidFill>
-            <a:srgbClr val="7A8B8B"/>
+            <a:srgbClr val="6B7A90"/>
           </a:solidFill>
           <a:ln w="12700">
             <a:solidFill>
@@ -3544,14 +4562,14 @@
       </p:sp>
       <p:sp>
         <p:nvSpPr>
-          <p:cNvPr id="14" name="pha-chu"/>
+          <p:cNvPr id="17" name="pha-chu"/>
           <p:cNvSpPr txBox="1"/>
           <p:nvPr/>
         </p:nvSpPr>
         <p:spPr>
           <a:xfrm>
-            <a:off x="6711696" y="1645920"/>
-            <a:ext cx="2011680" cy="914400"/>
+            <a:off x="6720840" y="1554480"/>
+            <a:ext cx="1965960" cy="914400"/>
           </a:xfrm>
           <a:prstGeom prst="rect">
             <a:avLst/>
@@ -3580,14 +4598,14 @@
       </p:sp>
       <p:sp>
         <p:nvSpPr>
-          <p:cNvPr id="15" name="moc"/>
+          <p:cNvPr id="18" name="moc"/>
           <p:cNvSpPr txBox="1"/>
           <p:nvPr/>
         </p:nvSpPr>
         <p:spPr>
           <a:xfrm>
-            <a:off x="6711696" y="2697480"/>
-            <a:ext cx="2011680" cy="548640"/>
+            <a:off x="6720840" y="2606040"/>
+            <a:ext cx="1965960" cy="365760"/>
           </a:xfrm>
           <a:prstGeom prst="rect">
             <a:avLst/>
@@ -3605,12 +4623,93 @@
             <a:r>
               <a:rPr lang="en-US" sz="1400" dirty="0">
                 <a:solidFill>
-                  <a:srgbClr val="4A5656"/>
+                  <a:srgbClr val="6B7A90"/>
                 </a:solidFill>
               </a:rPr>
               <a:t>Mốc: ........</a:t>
             </a:r>
             <a:endParaRPr lang="en-US" sz="1400" dirty="0"/>
+          </a:p>
+        </p:txBody>
+      </p:sp>
+      <p:sp>
+        <p:nvSpPr>
+          <p:cNvPr id="19" name="phu-trach"/>
+          <p:cNvSpPr txBox="1"/>
+          <p:nvPr/>
+        </p:nvSpPr>
+        <p:spPr>
+          <a:xfrm>
+            <a:off x="6720840" y="2971800"/>
+            <a:ext cx="1965960" cy="365760"/>
+          </a:xfrm>
+          <a:prstGeom prst="rect">
+            <a:avLst/>
+          </a:prstGeom>
+          <a:noFill/>
+          <a:ln/>
+        </p:spPr>
+        <p:txBody>
+          <a:bodyPr wrap="square" lIns="0" tIns="0" rIns="0" bIns="0" rtlCol="0" anchor="ctr"/>
+          <a:lstStyle/>
+          <a:p>
+            <a:pPr algn="ctr" indent="0" marL="0">
+              <a:buNone/>
+            </a:pPr>
+            <a:r>
+              <a:rPr lang="en-US" sz="1400" dirty="0">
+                <a:solidFill>
+                  <a:srgbClr val="6B7A90"/>
+                </a:solidFill>
+              </a:rPr>
+              <a:t>Phụ trách: ........</a:t>
+            </a:r>
+            <a:endParaRPr lang="en-US" sz="1400" dirty="0"/>
+          </a:p>
+        </p:txBody>
+      </p:sp>
+      <p:sp>
+        <p:nvSpPr>
+          <p:cNvPr id="25" name="Slide Number Placeholder 0"/>
+          <p:cNvSpPr>
+            <a:spLocks noGrp="1"/>
+          </p:cNvSpPr>
+          <p:nvPr>
+            <p:ph type="sldNum" sz="quarter" idx="4294967295"/>
+          </p:nvPr>
+        </p:nvSpPr>
+        <p:spPr>
+          <a:xfrm>
+            <a:off x="8138160" y="4727448"/>
+            <a:ext cx="457200" cy="274320"/>
+          </a:xfrm>
+          <a:prstGeom prst="rect">
+            <a:avLst/>
+          </a:prstGeom>
+          <a:extLst>
+            <a:ext uri="{C572A759-6A51-4108-AA02-DFA0A04FC94B}">
+              <ma14:wrappingTextBoxFlag xmlns:ma14="http://schemas.microsoft.com/office/mac/drawingml/2011/main" val="0"/>
+            </a:ext>
+          </a:extLst>
+        </p:spPr>
+        <p:txBody>
+          <a:bodyPr/>
+          <a:lstStyle>
+            <a:lvl1pPr>
+              <a:defRPr sz="1100">
+                <a:solidFill>
+                  <a:srgbClr val="6B7A90"/>
+                </a:solidFill>
+              </a:defRPr>
+            </a:lvl1pPr>
+          </a:lstStyle>
+          <a:p>
+            <a:pPr algn="r"/>
+            <a:fld id="{F7021451-1387-4CA6-816F-3879F97B5CBC}" type="slidenum">
+              <a:rPr b="0" lang="en-US"/>
+              <a:t>6</a:t>
+            </a:fld>
+            <a:endParaRPr lang="en-US"/>
           </a:p>
         </p:txBody>
       </p:sp>
@@ -3649,8 +4748,8 @@
         </p:nvSpPr>
         <p:spPr>
           <a:xfrm>
-            <a:off x="457200" y="274320"/>
-            <a:ext cx="8229600" cy="868680"/>
+            <a:off x="548640" y="274320"/>
+            <a:ext cx="8046720" cy="868680"/>
           </a:xfrm>
           <a:prstGeom prst="rect">
             <a:avLst/>
@@ -3668,7 +4767,7 @@
             <a:r>
               <a:rPr lang="en-US" sz="2800" b="1" dirty="0">
                 <a:solidFill>
-                  <a:srgbClr val="0F3D3E"/>
+                  <a:srgbClr val="0B2A4A"/>
                 </a:solidFill>
               </a:rPr>
               <a:t>KPI: 1.500 hồ sơ, ba kênh đã có chỉ tiêu lead</a:t>
@@ -3692,18 +4791,18 @@
           </p:nvPr>
         </p:nvGraphicFramePr>
         <p:xfrm>
-          <a:off x="457200" y="1280160"/>
-          <a:ext cx="8229600" cy="914400"/>
+          <a:off x="548640" y="1280160"/>
+          <a:ext cx="8046720" cy="914400"/>
         </p:xfrm>
         <a:graphic>
           <a:graphicData uri="http://schemas.openxmlformats.org/drawingml/2006/table">
             <a:tbl>
               <a:tblPr/>
               <a:tblGrid>
-                <a:gridCol w="4572000"/>
-                <a:gridCol w="3657600"/>
+                <a:gridCol w="4754880"/>
+                <a:gridCol w="3291840"/>
               </a:tblGrid>
-              <a:tr h="411480">
+              <a:tr h="502920">
                 <a:tc>
                   <a:txBody>
                     <a:bodyPr/>
@@ -3713,20 +4812,20 @@
                         <a:buNone/>
                       </a:pPr>
                       <a:r>
-                        <a:rPr lang="en-US" sz="1400" b="1" dirty="0">
+                        <a:rPr lang="en-US" sz="1800" b="1" dirty="0">
                           <a:solidFill>
                             <a:srgbClr val="FFFFFF"/>
                           </a:solidFill>
                         </a:rPr>
                         <a:t>Kênh</a:t>
                       </a:r>
-                      <a:endParaRPr lang="en-US" sz="1400" dirty="0"/>
+                      <a:endParaRPr lang="en-US" sz="1800" dirty="0"/>
                     </a:p>
                   </a:txBody>
                   <a:tcPr marL="91440" marR="91440" marT="54864" marB="54864" anchor="ctr">
                     <a:lnL w="9525" cap="flat" cmpd="sng" algn="ctr">
                       <a:solidFill>
-                        <a:srgbClr val="B8C4C3"/>
+                        <a:srgbClr val="D5DCE6"/>
                       </a:solidFill>
                       <a:prstDash val="solid"/>
                       <a:round/>
@@ -3735,7 +4834,7 @@
                     </a:lnL>
                     <a:lnR w="9525" cap="flat" cmpd="sng" algn="ctr">
                       <a:solidFill>
-                        <a:srgbClr val="B8C4C3"/>
+                        <a:srgbClr val="D5DCE6"/>
                       </a:solidFill>
                       <a:prstDash val="solid"/>
                       <a:round/>
@@ -3744,7 +4843,7 @@
                     </a:lnR>
                     <a:lnT w="9525" cap="flat" cmpd="sng" algn="ctr">
                       <a:solidFill>
-                        <a:srgbClr val="B8C4C3"/>
+                        <a:srgbClr val="D5DCE6"/>
                       </a:solidFill>
                       <a:prstDash val="solid"/>
                       <a:round/>
@@ -3753,7 +4852,7 @@
                     </a:lnT>
                     <a:lnB w="9525" cap="flat" cmpd="sng" algn="ctr">
                       <a:solidFill>
-                        <a:srgbClr val="B8C4C3"/>
+                        <a:srgbClr val="D5DCE6"/>
                       </a:solidFill>
                       <a:prstDash val="solid"/>
                       <a:round/>
@@ -3761,7 +4860,7 @@
                       <a:tailEnd type="none" w="med" len="med"/>
                     </a:lnB>
                     <a:solidFill>
-                      <a:srgbClr val="0F3D3E"/>
+                      <a:srgbClr val="0B2A4A"/>
                     </a:solidFill>
                   </a:tcPr>
                 </a:tc>
@@ -3774,20 +4873,20 @@
                         <a:buNone/>
                       </a:pPr>
                       <a:r>
-                        <a:rPr lang="en-US" sz="1400" b="1" dirty="0">
+                        <a:rPr lang="en-US" sz="1800" b="1" dirty="0">
                           <a:solidFill>
                             <a:srgbClr val="FFFFFF"/>
                           </a:solidFill>
                         </a:rPr>
                         <a:t>KPI</a:t>
                       </a:r>
-                      <a:endParaRPr lang="en-US" sz="1400" dirty="0"/>
+                      <a:endParaRPr lang="en-US" sz="1800" dirty="0"/>
                     </a:p>
                   </a:txBody>
                   <a:tcPr marL="91440" marR="91440" marT="54864" marB="54864" anchor="ctr">
                     <a:lnL w="9525" cap="flat" cmpd="sng" algn="ctr">
                       <a:solidFill>
-                        <a:srgbClr val="B8C4C3"/>
+                        <a:srgbClr val="D5DCE6"/>
                       </a:solidFill>
                       <a:prstDash val="solid"/>
                       <a:round/>
@@ -3796,7 +4895,7 @@
                     </a:lnL>
                     <a:lnR w="9525" cap="flat" cmpd="sng" algn="ctr">
                       <a:solidFill>
-                        <a:srgbClr val="B8C4C3"/>
+                        <a:srgbClr val="D5DCE6"/>
                       </a:solidFill>
                       <a:prstDash val="solid"/>
                       <a:round/>
@@ -3805,7 +4904,7 @@
                     </a:lnR>
                     <a:lnT w="9525" cap="flat" cmpd="sng" algn="ctr">
                       <a:solidFill>
-                        <a:srgbClr val="B8C4C3"/>
+                        <a:srgbClr val="D5DCE6"/>
                       </a:solidFill>
                       <a:prstDash val="solid"/>
                       <a:round/>
@@ -3814,7 +4913,7 @@
                     </a:lnT>
                     <a:lnB w="9525" cap="flat" cmpd="sng" algn="ctr">
                       <a:solidFill>
-                        <a:srgbClr val="B8C4C3"/>
+                        <a:srgbClr val="D5DCE6"/>
                       </a:solidFill>
                       <a:prstDash val="solid"/>
                       <a:round/>
@@ -3822,7 +4921,7 @@
                       <a:tailEnd type="none" w="med" len="med"/>
                     </a:lnB>
                     <a:solidFill>
-                      <a:srgbClr val="0F3D3E"/>
+                      <a:srgbClr val="0B2A4A"/>
                     </a:solidFill>
                   </a:tcPr>
                 </a:tc>
@@ -3837,20 +4936,20 @@
                         <a:buNone/>
                       </a:pPr>
                       <a:r>
-                        <a:rPr lang="en-US" sz="1400" b="1" dirty="0">
+                        <a:rPr lang="en-US" sz="1800" b="1" dirty="0">
                           <a:solidFill>
-                            <a:srgbClr val="1B1F2A"/>
+                            <a:srgbClr val="1A2433"/>
                           </a:solidFill>
                         </a:rPr>
                         <a:t>Facebook Ads</a:t>
                       </a:r>
-                      <a:endParaRPr lang="en-US" sz="1400" dirty="0"/>
+                      <a:endParaRPr lang="en-US" sz="1800" dirty="0"/>
                     </a:p>
                   </a:txBody>
                   <a:tcPr marL="91440" marR="91440" marT="54864" marB="54864" anchor="ctr">
                     <a:lnL w="9525" cap="flat" cmpd="sng" algn="ctr">
                       <a:solidFill>
-                        <a:srgbClr val="B8C4C3"/>
+                        <a:srgbClr val="D5DCE6"/>
                       </a:solidFill>
                       <a:prstDash val="solid"/>
                       <a:round/>
@@ -3859,7 +4958,7 @@
                     </a:lnL>
                     <a:lnR w="9525" cap="flat" cmpd="sng" algn="ctr">
                       <a:solidFill>
-                        <a:srgbClr val="B8C4C3"/>
+                        <a:srgbClr val="D5DCE6"/>
                       </a:solidFill>
                       <a:prstDash val="solid"/>
                       <a:round/>
@@ -3868,7 +4967,7 @@
                     </a:lnR>
                     <a:lnT w="9525" cap="flat" cmpd="sng" algn="ctr">
                       <a:solidFill>
-                        <a:srgbClr val="B8C4C3"/>
+                        <a:srgbClr val="D5DCE6"/>
                       </a:solidFill>
                       <a:prstDash val="solid"/>
                       <a:round/>
@@ -3877,13 +4976,16 @@
                     </a:lnT>
                     <a:lnB w="9525" cap="flat" cmpd="sng" algn="ctr">
                       <a:solidFill>
-                        <a:srgbClr val="B8C4C3"/>
+                        <a:srgbClr val="D5DCE6"/>
                       </a:solidFill>
                       <a:prstDash val="solid"/>
                       <a:round/>
                       <a:headEnd type="none" w="med" len="med"/>
                       <a:tailEnd type="none" w="med" len="med"/>
                     </a:lnB>
+                    <a:solidFill>
+                      <a:srgbClr val="FFFFFF"/>
+                    </a:solidFill>
                   </a:tcPr>
                 </a:tc>
                 <a:tc>
@@ -3895,20 +4997,20 @@
                         <a:buNone/>
                       </a:pPr>
                       <a:r>
-                        <a:rPr lang="en-US" sz="1400" dirty="0">
+                        <a:rPr lang="en-US" sz="1800" dirty="0">
                           <a:solidFill>
-                            <a:srgbClr val="1B1F2A"/>
+                            <a:srgbClr val="1A2433"/>
                           </a:solidFill>
                         </a:rPr>
                         <a:t>600 lead</a:t>
                       </a:r>
-                      <a:endParaRPr lang="en-US" sz="1400" dirty="0"/>
+                      <a:endParaRPr lang="en-US" sz="1800" dirty="0"/>
                     </a:p>
                   </a:txBody>
                   <a:tcPr marL="91440" marR="91440" marT="54864" marB="54864" anchor="ctr">
                     <a:lnL w="9525" cap="flat" cmpd="sng" algn="ctr">
                       <a:solidFill>
-                        <a:srgbClr val="B8C4C3"/>
+                        <a:srgbClr val="D5DCE6"/>
                       </a:solidFill>
                       <a:prstDash val="solid"/>
                       <a:round/>
@@ -3917,7 +5019,7 @@
                     </a:lnL>
                     <a:lnR w="9525" cap="flat" cmpd="sng" algn="ctr">
                       <a:solidFill>
-                        <a:srgbClr val="B8C4C3"/>
+                        <a:srgbClr val="D5DCE6"/>
                       </a:solidFill>
                       <a:prstDash val="solid"/>
                       <a:round/>
@@ -3926,7 +5028,7 @@
                     </a:lnR>
                     <a:lnT w="9525" cap="flat" cmpd="sng" algn="ctr">
                       <a:solidFill>
-                        <a:srgbClr val="B8C4C3"/>
+                        <a:srgbClr val="D5DCE6"/>
                       </a:solidFill>
                       <a:prstDash val="solid"/>
                       <a:round/>
@@ -3935,13 +5037,16 @@
                     </a:lnT>
                     <a:lnB w="9525" cap="flat" cmpd="sng" algn="ctr">
                       <a:solidFill>
-                        <a:srgbClr val="B8C4C3"/>
+                        <a:srgbClr val="D5DCE6"/>
                       </a:solidFill>
                       <a:prstDash val="solid"/>
                       <a:round/>
                       <a:headEnd type="none" w="med" len="med"/>
                       <a:tailEnd type="none" w="med" len="med"/>
                     </a:lnB>
+                    <a:solidFill>
+                      <a:srgbClr val="FFFFFF"/>
+                    </a:solidFill>
                   </a:tcPr>
                 </a:tc>
               </a:tr>
@@ -3955,20 +5060,20 @@
                         <a:buNone/>
                       </a:pPr>
                       <a:r>
-                        <a:rPr lang="en-US" sz="1400" b="1" dirty="0">
+                        <a:rPr lang="en-US" sz="1800" b="1" dirty="0">
                           <a:solidFill>
-                            <a:srgbClr val="1B1F2A"/>
+                            <a:srgbClr val="1A2433"/>
                           </a:solidFill>
                         </a:rPr>
                         <a:t>Tư vấn tại trường THPT</a:t>
                       </a:r>
-                      <a:endParaRPr lang="en-US" sz="1400" dirty="0"/>
+                      <a:endParaRPr lang="en-US" sz="1800" dirty="0"/>
                     </a:p>
                   </a:txBody>
                   <a:tcPr marL="91440" marR="91440" marT="54864" marB="54864" anchor="ctr">
                     <a:lnL w="9525" cap="flat" cmpd="sng" algn="ctr">
                       <a:solidFill>
-                        <a:srgbClr val="B8C4C3"/>
+                        <a:srgbClr val="D5DCE6"/>
                       </a:solidFill>
                       <a:prstDash val="solid"/>
                       <a:round/>
@@ -3977,7 +5082,7 @@
                     </a:lnL>
                     <a:lnR w="9525" cap="flat" cmpd="sng" algn="ctr">
                       <a:solidFill>
-                        <a:srgbClr val="B8C4C3"/>
+                        <a:srgbClr val="D5DCE6"/>
                       </a:solidFill>
                       <a:prstDash val="solid"/>
                       <a:round/>
@@ -3986,7 +5091,7 @@
                     </a:lnR>
                     <a:lnT w="9525" cap="flat" cmpd="sng" algn="ctr">
                       <a:solidFill>
-                        <a:srgbClr val="B8C4C3"/>
+                        <a:srgbClr val="D5DCE6"/>
                       </a:solidFill>
                       <a:prstDash val="solid"/>
                       <a:round/>
@@ -3995,13 +5100,16 @@
                     </a:lnT>
                     <a:lnB w="9525" cap="flat" cmpd="sng" algn="ctr">
                       <a:solidFill>
-                        <a:srgbClr val="B8C4C3"/>
+                        <a:srgbClr val="D5DCE6"/>
                       </a:solidFill>
                       <a:prstDash val="solid"/>
                       <a:round/>
                       <a:headEnd type="none" w="med" len="med"/>
                       <a:tailEnd type="none" w="med" len="med"/>
                     </a:lnB>
+                    <a:solidFill>
+                      <a:srgbClr val="F1F4F8"/>
+                    </a:solidFill>
                   </a:tcPr>
                 </a:tc>
                 <a:tc>
@@ -4013,20 +5121,20 @@
                         <a:buNone/>
                       </a:pPr>
                       <a:r>
-                        <a:rPr lang="en-US" sz="1400" dirty="0">
+                        <a:rPr lang="en-US" sz="1800" dirty="0">
                           <a:solidFill>
-                            <a:srgbClr val="1B1F2A"/>
+                            <a:srgbClr val="1A2433"/>
                           </a:solidFill>
                         </a:rPr>
                         <a:t>400 lead</a:t>
                       </a:r>
-                      <a:endParaRPr lang="en-US" sz="1400" dirty="0"/>
+                      <a:endParaRPr lang="en-US" sz="1800" dirty="0"/>
                     </a:p>
                   </a:txBody>
                   <a:tcPr marL="91440" marR="91440" marT="54864" marB="54864" anchor="ctr">
                     <a:lnL w="9525" cap="flat" cmpd="sng" algn="ctr">
                       <a:solidFill>
-                        <a:srgbClr val="B8C4C3"/>
+                        <a:srgbClr val="D5DCE6"/>
                       </a:solidFill>
                       <a:prstDash val="solid"/>
                       <a:round/>
@@ -4035,7 +5143,7 @@
                     </a:lnL>
                     <a:lnR w="9525" cap="flat" cmpd="sng" algn="ctr">
                       <a:solidFill>
-                        <a:srgbClr val="B8C4C3"/>
+                        <a:srgbClr val="D5DCE6"/>
                       </a:solidFill>
                       <a:prstDash val="solid"/>
                       <a:round/>
@@ -4044,7 +5152,7 @@
                     </a:lnR>
                     <a:lnT w="9525" cap="flat" cmpd="sng" algn="ctr">
                       <a:solidFill>
-                        <a:srgbClr val="B8C4C3"/>
+                        <a:srgbClr val="D5DCE6"/>
                       </a:solidFill>
                       <a:prstDash val="solid"/>
                       <a:round/>
@@ -4053,13 +5161,16 @@
                     </a:lnT>
                     <a:lnB w="9525" cap="flat" cmpd="sng" algn="ctr">
                       <a:solidFill>
-                        <a:srgbClr val="B8C4C3"/>
+                        <a:srgbClr val="D5DCE6"/>
                       </a:solidFill>
                       <a:prstDash val="solid"/>
                       <a:round/>
                       <a:headEnd type="none" w="med" len="med"/>
                       <a:tailEnd type="none" w="med" len="med"/>
                     </a:lnB>
+                    <a:solidFill>
+                      <a:srgbClr val="F1F4F8"/>
+                    </a:solidFill>
                   </a:tcPr>
                 </a:tc>
               </a:tr>
@@ -4073,20 +5184,20 @@
                         <a:buNone/>
                       </a:pPr>
                       <a:r>
-                        <a:rPr lang="en-US" sz="1400" b="1" dirty="0">
+                        <a:rPr lang="en-US" sz="1800" b="1" dirty="0">
                           <a:solidFill>
-                            <a:srgbClr val="1B1F2A"/>
+                            <a:srgbClr val="1A2433"/>
                           </a:solidFill>
                         </a:rPr>
                         <a:t>Website và SEO</a:t>
                       </a:r>
-                      <a:endParaRPr lang="en-US" sz="1400" dirty="0"/>
+                      <a:endParaRPr lang="en-US" sz="1800" dirty="0"/>
                     </a:p>
                   </a:txBody>
                   <a:tcPr marL="91440" marR="91440" marT="54864" marB="54864" anchor="ctr">
                     <a:lnL w="9525" cap="flat" cmpd="sng" algn="ctr">
                       <a:solidFill>
-                        <a:srgbClr val="B8C4C3"/>
+                        <a:srgbClr val="D5DCE6"/>
                       </a:solidFill>
                       <a:prstDash val="solid"/>
                       <a:round/>
@@ -4095,7 +5206,7 @@
                     </a:lnL>
                     <a:lnR w="9525" cap="flat" cmpd="sng" algn="ctr">
                       <a:solidFill>
-                        <a:srgbClr val="B8C4C3"/>
+                        <a:srgbClr val="D5DCE6"/>
                       </a:solidFill>
                       <a:prstDash val="solid"/>
                       <a:round/>
@@ -4104,7 +5215,7 @@
                     </a:lnR>
                     <a:lnT w="9525" cap="flat" cmpd="sng" algn="ctr">
                       <a:solidFill>
-                        <a:srgbClr val="B8C4C3"/>
+                        <a:srgbClr val="D5DCE6"/>
                       </a:solidFill>
                       <a:prstDash val="solid"/>
                       <a:round/>
@@ -4113,13 +5224,16 @@
                     </a:lnT>
                     <a:lnB w="9525" cap="flat" cmpd="sng" algn="ctr">
                       <a:solidFill>
-                        <a:srgbClr val="B8C4C3"/>
+                        <a:srgbClr val="D5DCE6"/>
                       </a:solidFill>
                       <a:prstDash val="solid"/>
                       <a:round/>
                       <a:headEnd type="none" w="med" len="med"/>
                       <a:tailEnd type="none" w="med" len="med"/>
                     </a:lnB>
+                    <a:solidFill>
+                      <a:srgbClr val="FFFFFF"/>
+                    </a:solidFill>
                   </a:tcPr>
                 </a:tc>
                 <a:tc>
@@ -4131,20 +5245,20 @@
                         <a:buNone/>
                       </a:pPr>
                       <a:r>
-                        <a:rPr lang="en-US" sz="1400" dirty="0">
+                        <a:rPr lang="en-US" sz="1800" dirty="0">
                           <a:solidFill>
-                            <a:srgbClr val="1B1F2A"/>
+                            <a:srgbClr val="1A2433"/>
                           </a:solidFill>
                         </a:rPr>
                         <a:t>300 lead</a:t>
                       </a:r>
-                      <a:endParaRPr lang="en-US" sz="1400" dirty="0"/>
+                      <a:endParaRPr lang="en-US" sz="1800" dirty="0"/>
                     </a:p>
                   </a:txBody>
                   <a:tcPr marL="91440" marR="91440" marT="54864" marB="54864" anchor="ctr">
                     <a:lnL w="9525" cap="flat" cmpd="sng" algn="ctr">
                       <a:solidFill>
-                        <a:srgbClr val="B8C4C3"/>
+                        <a:srgbClr val="D5DCE6"/>
                       </a:solidFill>
                       <a:prstDash val="solid"/>
                       <a:round/>
@@ -4153,7 +5267,7 @@
                     </a:lnL>
                     <a:lnR w="9525" cap="flat" cmpd="sng" algn="ctr">
                       <a:solidFill>
-                        <a:srgbClr val="B8C4C3"/>
+                        <a:srgbClr val="D5DCE6"/>
                       </a:solidFill>
                       <a:prstDash val="solid"/>
                       <a:round/>
@@ -4162,7 +5276,7 @@
                     </a:lnR>
                     <a:lnT w="9525" cap="flat" cmpd="sng" algn="ctr">
                       <a:solidFill>
-                        <a:srgbClr val="B8C4C3"/>
+                        <a:srgbClr val="D5DCE6"/>
                       </a:solidFill>
                       <a:prstDash val="solid"/>
                       <a:round/>
@@ -4171,13 +5285,16 @@
                     </a:lnT>
                     <a:lnB w="9525" cap="flat" cmpd="sng" algn="ctr">
                       <a:solidFill>
-                        <a:srgbClr val="B8C4C3"/>
+                        <a:srgbClr val="D5DCE6"/>
                       </a:solidFill>
                       <a:prstDash val="solid"/>
                       <a:round/>
                       <a:headEnd type="none" w="med" len="med"/>
                       <a:tailEnd type="none" w="med" len="med"/>
                     </a:lnB>
+                    <a:solidFill>
+                      <a:srgbClr val="FFFFFF"/>
+                    </a:solidFill>
                   </a:tcPr>
                 </a:tc>
               </a:tr>
@@ -4191,20 +5308,20 @@
                         <a:buNone/>
                       </a:pPr>
                       <a:r>
-                        <a:rPr lang="en-US" sz="1400" b="1" dirty="0">
+                        <a:rPr lang="en-US" sz="1800" b="1" dirty="0">
                           <a:solidFill>
-                            <a:srgbClr val="1B1F2A"/>
+                            <a:srgbClr val="1A2433"/>
                           </a:solidFill>
                         </a:rPr>
                         <a:t>Zalo OA</a:t>
                       </a:r>
-                      <a:endParaRPr lang="en-US" sz="1400" dirty="0"/>
+                      <a:endParaRPr lang="en-US" sz="1800" dirty="0"/>
                     </a:p>
                   </a:txBody>
                   <a:tcPr marL="91440" marR="91440" marT="54864" marB="54864" anchor="ctr">
                     <a:lnL w="9525" cap="flat" cmpd="sng" algn="ctr">
                       <a:solidFill>
-                        <a:srgbClr val="B8C4C3"/>
+                        <a:srgbClr val="D5DCE6"/>
                       </a:solidFill>
                       <a:prstDash val="solid"/>
                       <a:round/>
@@ -4213,7 +5330,7 @@
                     </a:lnL>
                     <a:lnR w="9525" cap="flat" cmpd="sng" algn="ctr">
                       <a:solidFill>
-                        <a:srgbClr val="B8C4C3"/>
+                        <a:srgbClr val="D5DCE6"/>
                       </a:solidFill>
                       <a:prstDash val="solid"/>
                       <a:round/>
@@ -4222,7 +5339,7 @@
                     </a:lnR>
                     <a:lnT w="9525" cap="flat" cmpd="sng" algn="ctr">
                       <a:solidFill>
-                        <a:srgbClr val="B8C4C3"/>
+                        <a:srgbClr val="D5DCE6"/>
                       </a:solidFill>
                       <a:prstDash val="solid"/>
                       <a:round/>
@@ -4231,13 +5348,16 @@
                     </a:lnT>
                     <a:lnB w="9525" cap="flat" cmpd="sng" algn="ctr">
                       <a:solidFill>
-                        <a:srgbClr val="B8C4C3"/>
+                        <a:srgbClr val="D5DCE6"/>
                       </a:solidFill>
                       <a:prstDash val="solid"/>
                       <a:round/>
                       <a:headEnd type="none" w="med" len="med"/>
                       <a:tailEnd type="none" w="med" len="med"/>
                     </a:lnB>
+                    <a:solidFill>
+                      <a:srgbClr val="F1F4F8"/>
+                    </a:solidFill>
                   </a:tcPr>
                 </a:tc>
                 <a:tc>
@@ -4249,20 +5369,20 @@
                         <a:buNone/>
                       </a:pPr>
                       <a:r>
-                        <a:rPr lang="en-US" sz="1400" dirty="0">
+                        <a:rPr lang="en-US" sz="1800" dirty="0">
                           <a:solidFill>
-                            <a:srgbClr val="1B1F2A"/>
+                            <a:srgbClr val="1A2433"/>
                           </a:solidFill>
                         </a:rPr>
                         <a:t>Chưa có KPI</a:t>
                       </a:r>
-                      <a:endParaRPr lang="en-US" sz="1400" dirty="0"/>
+                      <a:endParaRPr lang="en-US" sz="1800" dirty="0"/>
                     </a:p>
                   </a:txBody>
                   <a:tcPr marL="91440" marR="91440" marT="54864" marB="54864" anchor="ctr">
                     <a:lnL w="9525" cap="flat" cmpd="sng" algn="ctr">
                       <a:solidFill>
-                        <a:srgbClr val="B8C4C3"/>
+                        <a:srgbClr val="D5DCE6"/>
                       </a:solidFill>
                       <a:prstDash val="solid"/>
                       <a:round/>
@@ -4271,7 +5391,7 @@
                     </a:lnL>
                     <a:lnR w="9525" cap="flat" cmpd="sng" algn="ctr">
                       <a:solidFill>
-                        <a:srgbClr val="B8C4C3"/>
+                        <a:srgbClr val="D5DCE6"/>
                       </a:solidFill>
                       <a:prstDash val="solid"/>
                       <a:round/>
@@ -4280,7 +5400,7 @@
                     </a:lnR>
                     <a:lnT w="9525" cap="flat" cmpd="sng" algn="ctr">
                       <a:solidFill>
-                        <a:srgbClr val="B8C4C3"/>
+                        <a:srgbClr val="D5DCE6"/>
                       </a:solidFill>
                       <a:prstDash val="solid"/>
                       <a:round/>
@@ -4289,13 +5409,16 @@
                     </a:lnT>
                     <a:lnB w="9525" cap="flat" cmpd="sng" algn="ctr">
                       <a:solidFill>
-                        <a:srgbClr val="B8C4C3"/>
+                        <a:srgbClr val="D5DCE6"/>
                       </a:solidFill>
                       <a:prstDash val="solid"/>
                       <a:round/>
                       <a:headEnd type="none" w="med" len="med"/>
                       <a:tailEnd type="none" w="med" len="med"/>
                     </a:lnB>
+                    <a:solidFill>
+                      <a:srgbClr val="F1F4F8"/>
+                    </a:solidFill>
                   </a:tcPr>
                 </a:tc>
               </a:tr>
@@ -4309,20 +5432,20 @@
                         <a:buNone/>
                       </a:pPr>
                       <a:r>
-                        <a:rPr lang="en-US" sz="1400" b="1" dirty="0">
+                        <a:rPr lang="en-US" sz="1800" b="1" dirty="0">
                           <a:solidFill>
-                            <a:srgbClr val="1B1F2A"/>
+                            <a:srgbClr val="1A2433"/>
                           </a:solidFill>
                         </a:rPr>
                         <a:t>Tổng</a:t>
                       </a:r>
-                      <a:endParaRPr lang="en-US" sz="1400" dirty="0"/>
+                      <a:endParaRPr lang="en-US" sz="1800" dirty="0"/>
                     </a:p>
                   </a:txBody>
                   <a:tcPr marL="91440" marR="91440" marT="54864" marB="54864" anchor="ctr">
                     <a:lnL w="9525" cap="flat" cmpd="sng" algn="ctr">
                       <a:solidFill>
-                        <a:srgbClr val="B8C4C3"/>
+                        <a:srgbClr val="D5DCE6"/>
                       </a:solidFill>
                       <a:prstDash val="solid"/>
                       <a:round/>
@@ -4331,7 +5454,7 @@
                     </a:lnL>
                     <a:lnR w="9525" cap="flat" cmpd="sng" algn="ctr">
                       <a:solidFill>
-                        <a:srgbClr val="B8C4C3"/>
+                        <a:srgbClr val="D5DCE6"/>
                       </a:solidFill>
                       <a:prstDash val="solid"/>
                       <a:round/>
@@ -4340,7 +5463,7 @@
                     </a:lnR>
                     <a:lnT w="9525" cap="flat" cmpd="sng" algn="ctr">
                       <a:solidFill>
-                        <a:srgbClr val="B8C4C3"/>
+                        <a:srgbClr val="D5DCE6"/>
                       </a:solidFill>
                       <a:prstDash val="solid"/>
                       <a:round/>
@@ -4349,13 +5472,16 @@
                     </a:lnT>
                     <a:lnB w="9525" cap="flat" cmpd="sng" algn="ctr">
                       <a:solidFill>
-                        <a:srgbClr val="B8C4C3"/>
+                        <a:srgbClr val="D5DCE6"/>
                       </a:solidFill>
                       <a:prstDash val="solid"/>
                       <a:round/>
                       <a:headEnd type="none" w="med" len="med"/>
                       <a:tailEnd type="none" w="med" len="med"/>
                     </a:lnB>
+                    <a:solidFill>
+                      <a:srgbClr val="FFFFFF"/>
+                    </a:solidFill>
                   </a:tcPr>
                 </a:tc>
                 <a:tc>
@@ -4367,20 +5493,20 @@
                         <a:buNone/>
                       </a:pPr>
                       <a:r>
-                        <a:rPr lang="en-US" sz="1400" dirty="0">
+                        <a:rPr lang="en-US" sz="1800" dirty="0">
                           <a:solidFill>
-                            <a:srgbClr val="1B1F2A"/>
+                            <a:srgbClr val="1A2433"/>
                           </a:solidFill>
                         </a:rPr>
                         <a:t>1.500 hồ sơ</a:t>
                       </a:r>
-                      <a:endParaRPr lang="en-US" sz="1400" dirty="0"/>
+                      <a:endParaRPr lang="en-US" sz="1800" dirty="0"/>
                     </a:p>
                   </a:txBody>
                   <a:tcPr marL="91440" marR="91440" marT="54864" marB="54864" anchor="ctr">
                     <a:lnL w="9525" cap="flat" cmpd="sng" algn="ctr">
                       <a:solidFill>
-                        <a:srgbClr val="B8C4C3"/>
+                        <a:srgbClr val="D5DCE6"/>
                       </a:solidFill>
                       <a:prstDash val="solid"/>
                       <a:round/>
@@ -4389,7 +5515,7 @@
                     </a:lnL>
                     <a:lnR w="9525" cap="flat" cmpd="sng" algn="ctr">
                       <a:solidFill>
-                        <a:srgbClr val="B8C4C3"/>
+                        <a:srgbClr val="D5DCE6"/>
                       </a:solidFill>
                       <a:prstDash val="solid"/>
                       <a:round/>
@@ -4398,7 +5524,7 @@
                     </a:lnR>
                     <a:lnT w="9525" cap="flat" cmpd="sng" algn="ctr">
                       <a:solidFill>
-                        <a:srgbClr val="B8C4C3"/>
+                        <a:srgbClr val="D5DCE6"/>
                       </a:solidFill>
                       <a:prstDash val="solid"/>
                       <a:round/>
@@ -4407,13 +5533,16 @@
                     </a:lnT>
                     <a:lnB w="9525" cap="flat" cmpd="sng" algn="ctr">
                       <a:solidFill>
-                        <a:srgbClr val="B8C4C3"/>
+                        <a:srgbClr val="D5DCE6"/>
                       </a:solidFill>
                       <a:prstDash val="solid"/>
                       <a:round/>
                       <a:headEnd type="none" w="med" len="med"/>
                       <a:tailEnd type="none" w="med" len="med"/>
                     </a:lnB>
+                    <a:solidFill>
+                      <a:srgbClr val="FFFFFF"/>
+                    </a:solidFill>
                   </a:tcPr>
                 </a:tc>
               </a:tr>
@@ -4421,6 +5550,794 @@
           </a:graphicData>
         </a:graphic>
       </p:graphicFrame>
+      <p:sp>
+        <p:nvSpPr>
+          <p:cNvPr id="25" name="Slide Number Placeholder 0"/>
+          <p:cNvSpPr>
+            <a:spLocks noGrp="1"/>
+          </p:cNvSpPr>
+          <p:nvPr>
+            <p:ph type="sldNum" sz="quarter" idx="4294967295"/>
+          </p:nvPr>
+        </p:nvSpPr>
+        <p:spPr>
+          <a:xfrm>
+            <a:off x="8138160" y="4727448"/>
+            <a:ext cx="457200" cy="274320"/>
+          </a:xfrm>
+          <a:prstGeom prst="rect">
+            <a:avLst/>
+          </a:prstGeom>
+          <a:extLst>
+            <a:ext uri="{C572A759-6A51-4108-AA02-DFA0A04FC94B}">
+              <ma14:wrappingTextBoxFlag xmlns:ma14="http://schemas.microsoft.com/office/mac/drawingml/2011/main" val="0"/>
+            </a:ext>
+          </a:extLst>
+        </p:spPr>
+        <p:txBody>
+          <a:bodyPr/>
+          <a:lstStyle>
+            <a:lvl1pPr>
+              <a:defRPr sz="1100">
+                <a:solidFill>
+                  <a:srgbClr val="6B7A90"/>
+                </a:solidFill>
+              </a:defRPr>
+            </a:lvl1pPr>
+          </a:lstStyle>
+          <a:p>
+            <a:pPr algn="r"/>
+            <a:fld id="{F7021451-1387-4CA6-816F-3879F97B5CBC}" type="slidenum">
+              <a:rPr b="0" lang="en-US"/>
+              <a:t>7</a:t>
+            </a:fld>
+            <a:endParaRPr lang="en-US"/>
+          </a:p>
+        </p:txBody>
+      </p:sp>
+    </p:spTree>
+  </p:cSld>
+  <p:clrMapOvr>
+    <a:masterClrMapping/>
+  </p:clrMapOvr>
+</p:sld>
+</file>
+
+<file path=ppt/slides/slide8.xml><?xml version="1.0" encoding="utf-8"?>
+<p:sld xmlns:a="http://schemas.openxmlformats.org/drawingml/2006/main" xmlns:r="http://schemas.openxmlformats.org/officeDocument/2006/relationships" xmlns:p="http://schemas.openxmlformats.org/presentationml/2006/main">
+  <p:cSld name="Slide 8">
+    <p:spTree>
+      <p:nvGrpSpPr>
+        <p:cNvPr id="1" name=""/>
+        <p:cNvGrpSpPr/>
+        <p:nvPr/>
+      </p:nvGrpSpPr>
+      <p:grpSpPr>
+        <a:xfrm>
+          <a:off x="0" y="0"/>
+          <a:ext cx="0" cy="0"/>
+          <a:chOff x="0" y="0"/>
+          <a:chExt cx="0" cy="0"/>
+        </a:xfrm>
+      </p:grpSpPr>
+      <p:sp>
+        <p:nvSpPr>
+          <p:cNvPr id="2" name="Text 0"/>
+          <p:cNvSpPr/>
+          <p:nvPr>
+            <p:ph idx="100" type="title" hasCustomPrompt="1"/>
+          </p:nvPr>
+        </p:nvSpPr>
+        <p:spPr>
+          <a:xfrm>
+            <a:off x="548640" y="274320"/>
+            <a:ext cx="8046720" cy="868680"/>
+          </a:xfrm>
+          <a:prstGeom prst="rect">
+            <a:avLst/>
+          </a:prstGeom>
+          <a:noFill/>
+          <a:ln/>
+        </p:spPr>
+        <p:txBody>
+          <a:bodyPr wrap="square" lIns="0" tIns="0" rIns="0" bIns="0" rtlCol="0" anchor="ctr"/>
+          <a:lstStyle/>
+          <a:p>
+            <a:pPr algn="l" indent="0" marL="0">
+              <a:buNone/>
+            </a:pPr>
+            <a:r>
+              <a:rPr lang="en-US" sz="2800" b="1" dirty="0">
+                <a:solidFill>
+                  <a:srgbClr val="0B2A4A"/>
+                </a:solidFill>
+              </a:rPr>
+              <a:t>Năm điều cần bổ sung trước khi duyệt chiến dịch</a:t>
+            </a:r>
+            <a:endParaRPr lang="en-US" sz="2800" dirty="0"/>
+          </a:p>
+        </p:txBody>
+      </p:sp>
+      <p:sp>
+        <p:nvSpPr>
+          <p:cNvPr id="4" name="the"/>
+          <p:cNvSpPr/>
+          <p:nvPr/>
+        </p:nvSpPr>
+        <p:spPr>
+          <a:xfrm>
+            <a:off x="548640" y="1234440"/>
+            <a:ext cx="8046720" cy="548640"/>
+          </a:xfrm>
+          <a:prstGeom prst="roundRect">
+            <a:avLst>
+              <a:gd name="adj" fmla="val 13333"/>
+            </a:avLst>
+          </a:prstGeom>
+          <a:solidFill>
+            <a:srgbClr val="F1F4F8"/>
+          </a:solidFill>
+          <a:ln w="12700">
+            <a:solidFill>
+              <a:srgbClr val="F1F4F8"/>
+            </a:solidFill>
+            <a:prstDash val="solid"/>
+          </a:ln>
+        </p:spPr>
+      </p:sp>
+      <p:sp>
+        <p:nvSpPr>
+          <p:cNvPr id="5" name="so-thu-tu"/>
+          <p:cNvSpPr/>
+          <p:nvPr/>
+        </p:nvSpPr>
+        <p:spPr>
+          <a:xfrm>
+            <a:off x="777240" y="1211580"/>
+            <a:ext cx="594360" cy="594360"/>
+          </a:xfrm>
+          <a:prstGeom prst="ellipse">
+            <a:avLst/>
+          </a:prstGeom>
+          <a:solidFill>
+            <a:srgbClr val="B8902B"/>
+          </a:solidFill>
+          <a:ln w="12700">
+            <a:solidFill>
+              <a:srgbClr val="B8902B"/>
+            </a:solidFill>
+            <a:prstDash val="solid"/>
+          </a:ln>
+        </p:spPr>
+      </p:sp>
+      <p:sp>
+        <p:nvSpPr>
+          <p:cNvPr id="6" name="so-thu-tu-chu"/>
+          <p:cNvSpPr txBox="1"/>
+          <p:nvPr/>
+        </p:nvSpPr>
+        <p:spPr>
+          <a:xfrm>
+            <a:off x="777240" y="1211580"/>
+            <a:ext cx="594360" cy="594360"/>
+          </a:xfrm>
+          <a:prstGeom prst="rect">
+            <a:avLst/>
+          </a:prstGeom>
+          <a:noFill/>
+          <a:ln/>
+        </p:spPr>
+        <p:txBody>
+          <a:bodyPr wrap="square" lIns="0" tIns="0" rIns="0" bIns="0" rtlCol="0" anchor="ctr"/>
+          <a:lstStyle/>
+          <a:p>
+            <a:pPr algn="ctr" indent="0" marL="0">
+              <a:buNone/>
+            </a:pPr>
+            <a:r>
+              <a:rPr lang="en-US" sz="2200" b="1" dirty="0">
+                <a:solidFill>
+                  <a:srgbClr val="FFFFFF"/>
+                </a:solidFill>
+                <a:latin typeface="Cambria" pitchFamily="34" charset="0"/>
+                <a:ea typeface="Cambria" pitchFamily="34" charset="-122"/>
+                <a:cs typeface="Cambria" pitchFamily="34" charset="-120"/>
+              </a:rPr>
+              <a:t>1</a:t>
+            </a:r>
+            <a:endParaRPr lang="en-US" sz="2200" dirty="0"/>
+          </a:p>
+        </p:txBody>
+      </p:sp>
+      <p:sp>
+        <p:nvSpPr>
+          <p:cNvPr id="7" name="the-chu"/>
+          <p:cNvSpPr txBox="1"/>
+          <p:nvPr/>
+        </p:nvSpPr>
+        <p:spPr>
+          <a:xfrm>
+            <a:off x="1600200" y="1307592"/>
+            <a:ext cx="6766560" cy="402336"/>
+          </a:xfrm>
+          <a:prstGeom prst="rect">
+            <a:avLst/>
+          </a:prstGeom>
+          <a:noFill/>
+          <a:ln/>
+        </p:spPr>
+        <p:txBody>
+          <a:bodyPr wrap="square" lIns="0" tIns="0" rIns="0" bIns="0" rtlCol="0" anchor="ctr"/>
+          <a:lstStyle/>
+          <a:p>
+            <a:pPr indent="0" marL="0">
+              <a:buNone/>
+            </a:pPr>
+            <a:r>
+              <a:rPr lang="en-US" sz="1800" b="1" dirty="0">
+                <a:solidFill>
+                  <a:srgbClr val="0B2A4A"/>
+                </a:solidFill>
+              </a:rPr>
+              <a:t>Chỉ số, thời hạn cho mục tiêu nhận diện</a:t>
+            </a:r>
+            <a:endParaRPr lang="en-US" sz="1800" dirty="0"/>
+          </a:p>
+        </p:txBody>
+      </p:sp>
+      <p:sp>
+        <p:nvSpPr>
+          <p:cNvPr id="8" name="the"/>
+          <p:cNvSpPr/>
+          <p:nvPr/>
+        </p:nvSpPr>
+        <p:spPr>
+          <a:xfrm>
+            <a:off x="548640" y="1874520"/>
+            <a:ext cx="8046720" cy="548640"/>
+          </a:xfrm>
+          <a:prstGeom prst="roundRect">
+            <a:avLst>
+              <a:gd name="adj" fmla="val 13333"/>
+            </a:avLst>
+          </a:prstGeom>
+          <a:solidFill>
+            <a:srgbClr val="F1F4F8"/>
+          </a:solidFill>
+          <a:ln w="12700">
+            <a:solidFill>
+              <a:srgbClr val="F1F4F8"/>
+            </a:solidFill>
+            <a:prstDash val="solid"/>
+          </a:ln>
+        </p:spPr>
+      </p:sp>
+      <p:sp>
+        <p:nvSpPr>
+          <p:cNvPr id="9" name="so-thu-tu"/>
+          <p:cNvSpPr/>
+          <p:nvPr/>
+        </p:nvSpPr>
+        <p:spPr>
+          <a:xfrm>
+            <a:off x="777240" y="1851660"/>
+            <a:ext cx="594360" cy="594360"/>
+          </a:xfrm>
+          <a:prstGeom prst="ellipse">
+            <a:avLst/>
+          </a:prstGeom>
+          <a:solidFill>
+            <a:srgbClr val="B8902B"/>
+          </a:solidFill>
+          <a:ln w="12700">
+            <a:solidFill>
+              <a:srgbClr val="B8902B"/>
+            </a:solidFill>
+            <a:prstDash val="solid"/>
+          </a:ln>
+        </p:spPr>
+      </p:sp>
+      <p:sp>
+        <p:nvSpPr>
+          <p:cNvPr id="10" name="so-thu-tu-chu"/>
+          <p:cNvSpPr txBox="1"/>
+          <p:nvPr/>
+        </p:nvSpPr>
+        <p:spPr>
+          <a:xfrm>
+            <a:off x="777240" y="1851660"/>
+            <a:ext cx="594360" cy="594360"/>
+          </a:xfrm>
+          <a:prstGeom prst="rect">
+            <a:avLst/>
+          </a:prstGeom>
+          <a:noFill/>
+          <a:ln/>
+        </p:spPr>
+        <p:txBody>
+          <a:bodyPr wrap="square" lIns="0" tIns="0" rIns="0" bIns="0" rtlCol="0" anchor="ctr"/>
+          <a:lstStyle/>
+          <a:p>
+            <a:pPr algn="ctr" indent="0" marL="0">
+              <a:buNone/>
+            </a:pPr>
+            <a:r>
+              <a:rPr lang="en-US" sz="2200" b="1" dirty="0">
+                <a:solidFill>
+                  <a:srgbClr val="FFFFFF"/>
+                </a:solidFill>
+                <a:latin typeface="Cambria" pitchFamily="34" charset="0"/>
+                <a:ea typeface="Cambria" pitchFamily="34" charset="-122"/>
+                <a:cs typeface="Cambria" pitchFamily="34" charset="-120"/>
+              </a:rPr>
+              <a:t>2</a:t>
+            </a:r>
+            <a:endParaRPr lang="en-US" sz="2200" dirty="0"/>
+          </a:p>
+        </p:txBody>
+      </p:sp>
+      <p:sp>
+        <p:nvSpPr>
+          <p:cNvPr id="11" name="the-chu"/>
+          <p:cNvSpPr txBox="1"/>
+          <p:nvPr/>
+        </p:nvSpPr>
+        <p:spPr>
+          <a:xfrm>
+            <a:off x="1600200" y="1947672"/>
+            <a:ext cx="6766560" cy="402336"/>
+          </a:xfrm>
+          <a:prstGeom prst="rect">
+            <a:avLst/>
+          </a:prstGeom>
+          <a:noFill/>
+          <a:ln/>
+        </p:spPr>
+        <p:txBody>
+          <a:bodyPr wrap="square" lIns="0" tIns="0" rIns="0" bIns="0" rtlCol="0" anchor="ctr"/>
+          <a:lstStyle/>
+          <a:p>
+            <a:pPr indent="0" marL="0">
+              <a:buNone/>
+            </a:pPr>
+            <a:r>
+              <a:rPr lang="en-US" sz="1800" b="1" dirty="0">
+                <a:solidFill>
+                  <a:srgbClr val="0B2A4A"/>
+                </a:solidFill>
+              </a:rPr>
+              <a:t>Số liệu bằng chứng cho thông điệp chính</a:t>
+            </a:r>
+            <a:endParaRPr lang="en-US" sz="1800" dirty="0"/>
+          </a:p>
+        </p:txBody>
+      </p:sp>
+      <p:sp>
+        <p:nvSpPr>
+          <p:cNvPr id="12" name="the"/>
+          <p:cNvSpPr/>
+          <p:nvPr/>
+        </p:nvSpPr>
+        <p:spPr>
+          <a:xfrm>
+            <a:off x="548640" y="2514600"/>
+            <a:ext cx="8046720" cy="548640"/>
+          </a:xfrm>
+          <a:prstGeom prst="roundRect">
+            <a:avLst>
+              <a:gd name="adj" fmla="val 13333"/>
+            </a:avLst>
+          </a:prstGeom>
+          <a:solidFill>
+            <a:srgbClr val="F1F4F8"/>
+          </a:solidFill>
+          <a:ln w="12700">
+            <a:solidFill>
+              <a:srgbClr val="F1F4F8"/>
+            </a:solidFill>
+            <a:prstDash val="solid"/>
+          </a:ln>
+        </p:spPr>
+      </p:sp>
+      <p:sp>
+        <p:nvSpPr>
+          <p:cNvPr id="13" name="so-thu-tu"/>
+          <p:cNvSpPr/>
+          <p:nvPr/>
+        </p:nvSpPr>
+        <p:spPr>
+          <a:xfrm>
+            <a:off x="777240" y="2491740"/>
+            <a:ext cx="594360" cy="594360"/>
+          </a:xfrm>
+          <a:prstGeom prst="ellipse">
+            <a:avLst/>
+          </a:prstGeom>
+          <a:solidFill>
+            <a:srgbClr val="B8902B"/>
+          </a:solidFill>
+          <a:ln w="12700">
+            <a:solidFill>
+              <a:srgbClr val="B8902B"/>
+            </a:solidFill>
+            <a:prstDash val="solid"/>
+          </a:ln>
+        </p:spPr>
+      </p:sp>
+      <p:sp>
+        <p:nvSpPr>
+          <p:cNvPr id="14" name="so-thu-tu-chu"/>
+          <p:cNvSpPr txBox="1"/>
+          <p:nvPr/>
+        </p:nvSpPr>
+        <p:spPr>
+          <a:xfrm>
+            <a:off x="777240" y="2491740"/>
+            <a:ext cx="594360" cy="594360"/>
+          </a:xfrm>
+          <a:prstGeom prst="rect">
+            <a:avLst/>
+          </a:prstGeom>
+          <a:noFill/>
+          <a:ln/>
+        </p:spPr>
+        <p:txBody>
+          <a:bodyPr wrap="square" lIns="0" tIns="0" rIns="0" bIns="0" rtlCol="0" anchor="ctr"/>
+          <a:lstStyle/>
+          <a:p>
+            <a:pPr algn="ctr" indent="0" marL="0">
+              <a:buNone/>
+            </a:pPr>
+            <a:r>
+              <a:rPr lang="en-US" sz="2200" b="1" dirty="0">
+                <a:solidFill>
+                  <a:srgbClr val="FFFFFF"/>
+                </a:solidFill>
+                <a:latin typeface="Cambria" pitchFamily="34" charset="0"/>
+                <a:ea typeface="Cambria" pitchFamily="34" charset="-122"/>
+                <a:cs typeface="Cambria" pitchFamily="34" charset="-120"/>
+              </a:rPr>
+              <a:t>3</a:t>
+            </a:r>
+            <a:endParaRPr lang="en-US" sz="2200" dirty="0"/>
+          </a:p>
+        </p:txBody>
+      </p:sp>
+      <p:sp>
+        <p:nvSpPr>
+          <p:cNvPr id="15" name="the-chu"/>
+          <p:cNvSpPr txBox="1"/>
+          <p:nvPr/>
+        </p:nvSpPr>
+        <p:spPr>
+          <a:xfrm>
+            <a:off x="1600200" y="2587752"/>
+            <a:ext cx="6766560" cy="402336"/>
+          </a:xfrm>
+          <a:prstGeom prst="rect">
+            <a:avLst/>
+          </a:prstGeom>
+          <a:noFill/>
+          <a:ln/>
+        </p:spPr>
+        <p:txBody>
+          <a:bodyPr wrap="square" lIns="0" tIns="0" rIns="0" bIns="0" rtlCol="0" anchor="ctr"/>
+          <a:lstStyle/>
+          <a:p>
+            <a:pPr indent="0" marL="0">
+              <a:buNone/>
+            </a:pPr>
+            <a:r>
+              <a:rPr lang="en-US" sz="1800" b="1" dirty="0">
+                <a:solidFill>
+                  <a:srgbClr val="0B2A4A"/>
+                </a:solidFill>
+              </a:rPr>
+              <a:t>Mốc, người phụ trách của bốn pha</a:t>
+            </a:r>
+            <a:endParaRPr lang="en-US" sz="1800" dirty="0"/>
+          </a:p>
+        </p:txBody>
+      </p:sp>
+      <p:sp>
+        <p:nvSpPr>
+          <p:cNvPr id="16" name="the"/>
+          <p:cNvSpPr/>
+          <p:nvPr/>
+        </p:nvSpPr>
+        <p:spPr>
+          <a:xfrm>
+            <a:off x="548640" y="3154680"/>
+            <a:ext cx="8046720" cy="548640"/>
+          </a:xfrm>
+          <a:prstGeom prst="roundRect">
+            <a:avLst>
+              <a:gd name="adj" fmla="val 13333"/>
+            </a:avLst>
+          </a:prstGeom>
+          <a:solidFill>
+            <a:srgbClr val="F1F4F8"/>
+          </a:solidFill>
+          <a:ln w="12700">
+            <a:solidFill>
+              <a:srgbClr val="F1F4F8"/>
+            </a:solidFill>
+            <a:prstDash val="solid"/>
+          </a:ln>
+        </p:spPr>
+      </p:sp>
+      <p:sp>
+        <p:nvSpPr>
+          <p:cNvPr id="17" name="so-thu-tu"/>
+          <p:cNvSpPr/>
+          <p:nvPr/>
+        </p:nvSpPr>
+        <p:spPr>
+          <a:xfrm>
+            <a:off x="777240" y="3131820"/>
+            <a:ext cx="594360" cy="594360"/>
+          </a:xfrm>
+          <a:prstGeom prst="ellipse">
+            <a:avLst/>
+          </a:prstGeom>
+          <a:solidFill>
+            <a:srgbClr val="B8902B"/>
+          </a:solidFill>
+          <a:ln w="12700">
+            <a:solidFill>
+              <a:srgbClr val="B8902B"/>
+            </a:solidFill>
+            <a:prstDash val="solid"/>
+          </a:ln>
+        </p:spPr>
+      </p:sp>
+      <p:sp>
+        <p:nvSpPr>
+          <p:cNvPr id="18" name="so-thu-tu-chu"/>
+          <p:cNvSpPr txBox="1"/>
+          <p:nvPr/>
+        </p:nvSpPr>
+        <p:spPr>
+          <a:xfrm>
+            <a:off x="777240" y="3131820"/>
+            <a:ext cx="594360" cy="594360"/>
+          </a:xfrm>
+          <a:prstGeom prst="rect">
+            <a:avLst/>
+          </a:prstGeom>
+          <a:noFill/>
+          <a:ln/>
+        </p:spPr>
+        <p:txBody>
+          <a:bodyPr wrap="square" lIns="0" tIns="0" rIns="0" bIns="0" rtlCol="0" anchor="ctr"/>
+          <a:lstStyle/>
+          <a:p>
+            <a:pPr algn="ctr" indent="0" marL="0">
+              <a:buNone/>
+            </a:pPr>
+            <a:r>
+              <a:rPr lang="en-US" sz="2200" b="1" dirty="0">
+                <a:solidFill>
+                  <a:srgbClr val="FFFFFF"/>
+                </a:solidFill>
+                <a:latin typeface="Cambria" pitchFamily="34" charset="0"/>
+                <a:ea typeface="Cambria" pitchFamily="34" charset="-122"/>
+                <a:cs typeface="Cambria" pitchFamily="34" charset="-120"/>
+              </a:rPr>
+              <a:t>4</a:t>
+            </a:r>
+            <a:endParaRPr lang="en-US" sz="2200" dirty="0"/>
+          </a:p>
+        </p:txBody>
+      </p:sp>
+      <p:sp>
+        <p:nvSpPr>
+          <p:cNvPr id="19" name="the-chu"/>
+          <p:cNvSpPr txBox="1"/>
+          <p:nvPr/>
+        </p:nvSpPr>
+        <p:spPr>
+          <a:xfrm>
+            <a:off x="1600200" y="3227832"/>
+            <a:ext cx="6766560" cy="402336"/>
+          </a:xfrm>
+          <a:prstGeom prst="rect">
+            <a:avLst/>
+          </a:prstGeom>
+          <a:noFill/>
+          <a:ln/>
+        </p:spPr>
+        <p:txBody>
+          <a:bodyPr wrap="square" lIns="0" tIns="0" rIns="0" bIns="0" rtlCol="0" anchor="ctr"/>
+          <a:lstStyle/>
+          <a:p>
+            <a:pPr indent="0" marL="0">
+              <a:buNone/>
+            </a:pPr>
+            <a:r>
+              <a:rPr lang="en-US" sz="1800" b="1" dirty="0">
+                <a:solidFill>
+                  <a:srgbClr val="0B2A4A"/>
+                </a:solidFill>
+              </a:rPr>
+              <a:t>KPI của kênh Zalo OA</a:t>
+            </a:r>
+            <a:endParaRPr lang="en-US" sz="1800" dirty="0"/>
+          </a:p>
+        </p:txBody>
+      </p:sp>
+      <p:sp>
+        <p:nvSpPr>
+          <p:cNvPr id="20" name="the"/>
+          <p:cNvSpPr/>
+          <p:nvPr/>
+        </p:nvSpPr>
+        <p:spPr>
+          <a:xfrm>
+            <a:off x="548640" y="3794760"/>
+            <a:ext cx="8046720" cy="548640"/>
+          </a:xfrm>
+          <a:prstGeom prst="roundRect">
+            <a:avLst>
+              <a:gd name="adj" fmla="val 13333"/>
+            </a:avLst>
+          </a:prstGeom>
+          <a:solidFill>
+            <a:srgbClr val="F1F4F8"/>
+          </a:solidFill>
+          <a:ln w="12700">
+            <a:solidFill>
+              <a:srgbClr val="F1F4F8"/>
+            </a:solidFill>
+            <a:prstDash val="solid"/>
+          </a:ln>
+        </p:spPr>
+      </p:sp>
+      <p:sp>
+        <p:nvSpPr>
+          <p:cNvPr id="21" name="so-thu-tu"/>
+          <p:cNvSpPr/>
+          <p:nvPr/>
+        </p:nvSpPr>
+        <p:spPr>
+          <a:xfrm>
+            <a:off x="777240" y="3771900"/>
+            <a:ext cx="594360" cy="594360"/>
+          </a:xfrm>
+          <a:prstGeom prst="ellipse">
+            <a:avLst/>
+          </a:prstGeom>
+          <a:solidFill>
+            <a:srgbClr val="B8902B"/>
+          </a:solidFill>
+          <a:ln w="12700">
+            <a:solidFill>
+              <a:srgbClr val="B8902B"/>
+            </a:solidFill>
+            <a:prstDash val="solid"/>
+          </a:ln>
+        </p:spPr>
+      </p:sp>
+      <p:sp>
+        <p:nvSpPr>
+          <p:cNvPr id="22" name="so-thu-tu-chu"/>
+          <p:cNvSpPr txBox="1"/>
+          <p:nvPr/>
+        </p:nvSpPr>
+        <p:spPr>
+          <a:xfrm>
+            <a:off x="777240" y="3771900"/>
+            <a:ext cx="594360" cy="594360"/>
+          </a:xfrm>
+          <a:prstGeom prst="rect">
+            <a:avLst/>
+          </a:prstGeom>
+          <a:noFill/>
+          <a:ln/>
+        </p:spPr>
+        <p:txBody>
+          <a:bodyPr wrap="square" lIns="0" tIns="0" rIns="0" bIns="0" rtlCol="0" anchor="ctr"/>
+          <a:lstStyle/>
+          <a:p>
+            <a:pPr algn="ctr" indent="0" marL="0">
+              <a:buNone/>
+            </a:pPr>
+            <a:r>
+              <a:rPr lang="en-US" sz="2200" b="1" dirty="0">
+                <a:solidFill>
+                  <a:srgbClr val="FFFFFF"/>
+                </a:solidFill>
+                <a:latin typeface="Cambria" pitchFamily="34" charset="0"/>
+                <a:ea typeface="Cambria" pitchFamily="34" charset="-122"/>
+                <a:cs typeface="Cambria" pitchFamily="34" charset="-120"/>
+              </a:rPr>
+              <a:t>5</a:t>
+            </a:r>
+            <a:endParaRPr lang="en-US" sz="2200" dirty="0"/>
+          </a:p>
+        </p:txBody>
+      </p:sp>
+      <p:sp>
+        <p:nvSpPr>
+          <p:cNvPr id="23" name="the-chu"/>
+          <p:cNvSpPr txBox="1"/>
+          <p:nvPr/>
+        </p:nvSpPr>
+        <p:spPr>
+          <a:xfrm>
+            <a:off x="1600200" y="3867912"/>
+            <a:ext cx="6766560" cy="402336"/>
+          </a:xfrm>
+          <a:prstGeom prst="rect">
+            <a:avLst/>
+          </a:prstGeom>
+          <a:noFill/>
+          <a:ln/>
+        </p:spPr>
+        <p:txBody>
+          <a:bodyPr wrap="square" lIns="0" tIns="0" rIns="0" bIns="0" rtlCol="0" anchor="ctr"/>
+          <a:lstStyle/>
+          <a:p>
+            <a:pPr indent="0" marL="0">
+              <a:buNone/>
+            </a:pPr>
+            <a:r>
+              <a:rPr lang="en-US" sz="1800" b="1" dirty="0">
+                <a:solidFill>
+                  <a:srgbClr val="0B2A4A"/>
+                </a:solidFill>
+              </a:rPr>
+              <a:t>Giải thích chênh 20 triệu đồng ở tổng ngân sách</a:t>
+            </a:r>
+            <a:endParaRPr lang="en-US" sz="1800" dirty="0"/>
+          </a:p>
+        </p:txBody>
+      </p:sp>
+      <p:sp>
+        <p:nvSpPr>
+          <p:cNvPr id="25" name="Slide Number Placeholder 0"/>
+          <p:cNvSpPr>
+            <a:spLocks noGrp="1"/>
+          </p:cNvSpPr>
+          <p:nvPr>
+            <p:ph type="sldNum" sz="quarter" idx="4294967295"/>
+          </p:nvPr>
+        </p:nvSpPr>
+        <p:spPr>
+          <a:xfrm>
+            <a:off x="8138160" y="4727448"/>
+            <a:ext cx="457200" cy="274320"/>
+          </a:xfrm>
+          <a:prstGeom prst="rect">
+            <a:avLst/>
+          </a:prstGeom>
+          <a:extLst>
+            <a:ext uri="{C572A759-6A51-4108-AA02-DFA0A04FC94B}">
+              <ma14:wrappingTextBoxFlag xmlns:ma14="http://schemas.microsoft.com/office/mac/drawingml/2011/main" val="0"/>
+            </a:ext>
+          </a:extLst>
+        </p:spPr>
+        <p:txBody>
+          <a:bodyPr/>
+          <a:lstStyle>
+            <a:lvl1pPr>
+              <a:defRPr sz="1100">
+                <a:solidFill>
+                  <a:srgbClr val="6B7A90"/>
+                </a:solidFill>
+              </a:defRPr>
+            </a:lvl1pPr>
+          </a:lstStyle>
+          <a:p>
+            <a:pPr algn="r"/>
+            <a:fld id="{F7021451-1387-4CA6-816F-3879F97B5CBC}" type="slidenum">
+              <a:rPr b="0" lang="en-US"/>
+              <a:t>8</a:t>
+            </a:fld>
+            <a:endParaRPr lang="en-US"/>
+          </a:p>
+        </p:txBody>
+      </p:sp>
     </p:spTree>
   </p:cSld>
   <p:clrMapOvr>
@@ -4430,47 +6347,47 @@
 </file>
 
 <file path=ppt/theme/theme1.xml><?xml version="1.0" encoding="utf-8"?>
-<a:theme xmlns:a="http://schemas.openxmlformats.org/drawingml/2006/main" name="Thu nghiem">
+<a:theme xmlns:a="http://schemas.openxmlformats.org/drawingml/2006/main" name="Dai hoc">
   <a:themeElements>
-    <a:clrScheme name="Thu nghiem">
+    <a:clrScheme name="Dai hoc">
       <a:dk1>
-        <a:srgbClr val="1B1F2A"/>
+        <a:srgbClr val="1A2433"/>
       </a:dk1>
       <a:lt1>
         <a:srgbClr val="FFFFFF"/>
       </a:lt1>
       <a:dk2>
-        <a:srgbClr val="0F3D3E"/>
+        <a:srgbClr val="0B2A4A"/>
       </a:dk2>
       <a:lt2>
-        <a:srgbClr val="EEF3F2"/>
+        <a:srgbClr val="F1F4F8"/>
       </a:lt2>
       <a:accent1>
-        <a:srgbClr val="0F6E6E"/>
+        <a:srgbClr val="1F4E8C"/>
       </a:accent1>
       <a:accent2>
-        <a:srgbClr val="D9822B"/>
+        <a:srgbClr val="B8902B"/>
       </a:accent2>
       <a:accent3>
-        <a:srgbClr val="5B8DB8"/>
+        <a:srgbClr val="2E7D6B"/>
       </a:accent3>
       <a:accent4>
-        <a:srgbClr val="7A8B8B"/>
+        <a:srgbClr val="6B7A90"/>
       </a:accent4>
       <a:accent5>
-        <a:srgbClr val="B5473A"/>
+        <a:srgbClr val="A23B3B"/>
       </a:accent5>
       <a:accent6>
-        <a:srgbClr val="3E7C4F"/>
+        <a:srgbClr val="5B8DB8"/>
       </a:accent6>
       <a:hlink>
-        <a:srgbClr val="0F6E6E"/>
+        <a:srgbClr val="1F4E8C"/>
       </a:hlink>
       <a:folHlink>
-        <a:srgbClr val="7A8B8B"/>
+        <a:srgbClr val="6B7A90"/>
       </a:folHlink>
     </a:clrScheme>
-    <a:fontScheme name="Thu nghiem">
+    <a:fontScheme name="Dai hoc">
       <a:majorFont>
         <a:latin typeface="Cambria"/>
         <a:ea typeface=""/>
